--- a/slides/exports/営業会議_2026年7月度.pptx
+++ b/slides/exports/営業会議_2026年7月度.pptx
@@ -9,11 +9,9 @@
     <p:sldId id="257" r:id="rId3"/>
     <p:sldId id="258" r:id="rId4"/>
     <p:sldId id="259" r:id="rId5"/>
-    <p:sldId id="260" r:id="rId6"/>
-    <p:sldId id="261" r:id="rId7"/>
   </p:sldIdLst>
   <p:notesMasterIdLst>
-    <p:notesMasterId r:id="rId8"/>
+    <p:notesMasterId r:id="rId6"/>
   </p:notesMasterIdLst>
   <p:sldSz cx="12192000" cy="6858000"/>
   <p:notesSz cx="6858000" cy="12192000"/>
@@ -795,182 +793,6 @@
             <a:fld id="{F7021451-1387-4CA6-816F-3879F97B5CBC}" type="slidenum">
               <a:rPr lang="en-US"/>
               <a:t>4</a:t>
-            </a:fld>
-            <a:endParaRPr lang="en-US"/>
-          </a:p>
-        </p:txBody>
-      </p:sp>
-    </p:spTree>
-    <p:extLst>
-      <p:ext uri="{BB962C8B-B14F-4D97-AF65-F5344CB8AC3E}">
-        <p14:creationId xmlns:p14="http://schemas.microsoft.com/office/powerpoint/2010/main" val="1024086991"/>
-      </p:ext>
-    </p:extLst>
-  </p:cSld>
-  <p:clrMapOvr>
-    <a:masterClrMapping/>
-  </p:clrMapOvr>
-</p:notes>
-</file>
-
-<file path=ppt/notesSlides/notesSlide5.xml><?xml version="1.0" encoding="utf-8"?>
-<p:notes xmlns:a="http://schemas.openxmlformats.org/drawingml/2006/main" xmlns:r="http://schemas.openxmlformats.org/officeDocument/2006/relationships" xmlns:p="http://schemas.openxmlformats.org/presentationml/2006/main">
-  <p:cSld>
-    <p:spTree>
-      <p:nvGrpSpPr>
-        <p:cNvPr id="1" name=""/>
-        <p:cNvGrpSpPr/>
-        <p:nvPr/>
-      </p:nvGrpSpPr>
-      <p:grpSpPr>
-        <a:xfrm>
-          <a:off x="0" y="0"/>
-          <a:ext cx="0" cy="0"/>
-          <a:chOff x="0" y="0"/>
-          <a:chExt cx="0" cy="0"/>
-        </a:xfrm>
-      </p:grpSpPr>
-      <p:sp>
-        <p:nvSpPr>
-          <p:cNvPr id="2" name="Slide Image Placeholder 1"/>
-          <p:cNvSpPr>
-            <a:spLocks noGrp="1" noRot="1" noChangeAspect="1"/>
-          </p:cNvSpPr>
-          <p:nvPr>
-            <p:ph type="sldImg"/>
-          </p:nvPr>
-        </p:nvSpPr>
-        <p:spPr/>
-      </p:sp>
-      <p:sp>
-        <p:nvSpPr>
-          <p:cNvPr id="3" name="Notes Placeholder 2"/>
-          <p:cNvSpPr>
-            <a:spLocks noGrp="1"/>
-          </p:cNvSpPr>
-          <p:nvPr>
-            <p:ph type="body" idx="1"/>
-          </p:nvPr>
-        </p:nvSpPr>
-        <p:spPr/>
-        <p:txBody>
-          <a:bodyPr/>
-          <a:lstStyle/>
-          <a:p>
-            <a:r>
-              <a:rPr lang="en-US" dirty="0"/>
-              <a:t/>
-            </a:r>
-            <a:endParaRPr lang="en-US" dirty="0"/>
-          </a:p>
-        </p:txBody>
-      </p:sp>
-      <p:sp>
-        <p:nvSpPr>
-          <p:cNvPr id="4" name="Slide Number Placeholder 3"/>
-          <p:cNvSpPr>
-            <a:spLocks noGrp="1"/>
-          </p:cNvSpPr>
-          <p:nvPr>
-            <p:ph type="sldNum" sz="quarter" idx="10"/>
-          </p:nvPr>
-        </p:nvSpPr>
-        <p:spPr/>
-        <p:txBody>
-          <a:bodyPr/>
-          <a:lstStyle/>
-          <a:p>
-            <a:fld id="{F7021451-1387-4CA6-816F-3879F97B5CBC}" type="slidenum">
-              <a:rPr lang="en-US"/>
-              <a:t>5</a:t>
-            </a:fld>
-            <a:endParaRPr lang="en-US"/>
-          </a:p>
-        </p:txBody>
-      </p:sp>
-    </p:spTree>
-    <p:extLst>
-      <p:ext uri="{BB962C8B-B14F-4D97-AF65-F5344CB8AC3E}">
-        <p14:creationId xmlns:p14="http://schemas.microsoft.com/office/powerpoint/2010/main" val="1024086991"/>
-      </p:ext>
-    </p:extLst>
-  </p:cSld>
-  <p:clrMapOvr>
-    <a:masterClrMapping/>
-  </p:clrMapOvr>
-</p:notes>
-</file>
-
-<file path=ppt/notesSlides/notesSlide6.xml><?xml version="1.0" encoding="utf-8"?>
-<p:notes xmlns:a="http://schemas.openxmlformats.org/drawingml/2006/main" xmlns:r="http://schemas.openxmlformats.org/officeDocument/2006/relationships" xmlns:p="http://schemas.openxmlformats.org/presentationml/2006/main">
-  <p:cSld>
-    <p:spTree>
-      <p:nvGrpSpPr>
-        <p:cNvPr id="1" name=""/>
-        <p:cNvGrpSpPr/>
-        <p:nvPr/>
-      </p:nvGrpSpPr>
-      <p:grpSpPr>
-        <a:xfrm>
-          <a:off x="0" y="0"/>
-          <a:ext cx="0" cy="0"/>
-          <a:chOff x="0" y="0"/>
-          <a:chExt cx="0" cy="0"/>
-        </a:xfrm>
-      </p:grpSpPr>
-      <p:sp>
-        <p:nvSpPr>
-          <p:cNvPr id="2" name="Slide Image Placeholder 1"/>
-          <p:cNvSpPr>
-            <a:spLocks noGrp="1" noRot="1" noChangeAspect="1"/>
-          </p:cNvSpPr>
-          <p:nvPr>
-            <p:ph type="sldImg"/>
-          </p:nvPr>
-        </p:nvSpPr>
-        <p:spPr/>
-      </p:sp>
-      <p:sp>
-        <p:nvSpPr>
-          <p:cNvPr id="3" name="Notes Placeholder 2"/>
-          <p:cNvSpPr>
-            <a:spLocks noGrp="1"/>
-          </p:cNvSpPr>
-          <p:nvPr>
-            <p:ph type="body" idx="1"/>
-          </p:nvPr>
-        </p:nvSpPr>
-        <p:spPr/>
-        <p:txBody>
-          <a:bodyPr/>
-          <a:lstStyle/>
-          <a:p>
-            <a:r>
-              <a:rPr lang="en-US" dirty="0"/>
-              <a:t/>
-            </a:r>
-            <a:endParaRPr lang="en-US" dirty="0"/>
-          </a:p>
-        </p:txBody>
-      </p:sp>
-      <p:sp>
-        <p:nvSpPr>
-          <p:cNvPr id="4" name="Slide Number Placeholder 3"/>
-          <p:cNvSpPr>
-            <a:spLocks noGrp="1"/>
-          </p:cNvSpPr>
-          <p:nvPr>
-            <p:ph type="sldNum" sz="quarter" idx="10"/>
-          </p:nvPr>
-        </p:nvSpPr>
-        <p:spPr/>
-        <p:txBody>
-          <a:bodyPr/>
-          <a:lstStyle/>
-          <a:p>
-            <a:fld id="{F7021451-1387-4CA6-816F-3879F97B5CBC}" type="slidenum">
-              <a:rPr lang="en-US"/>
-              <a:t>6</a:t>
             </a:fld>
             <a:endParaRPr lang="en-US"/>
           </a:p>
@@ -6652,3231 +6474,6 @@
 </p:sld>
 </file>
 
-<file path=ppt/slides/slide5.xml><?xml version="1.0" encoding="utf-8"?>
-<p:sld xmlns:a="http://schemas.openxmlformats.org/drawingml/2006/main" xmlns:r="http://schemas.openxmlformats.org/officeDocument/2006/relationships" xmlns:p="http://schemas.openxmlformats.org/presentationml/2006/main">
-  <p:cSld name="Slide 5">
-    <p:bg>
-      <p:bgPr>
-        <a:solidFill>
-          <a:srgbClr val="FFFFFF"/>
-        </a:solidFill>
-      </p:bgPr>
-    </p:bg>
-    <p:spTree>
-      <p:nvGrpSpPr>
-        <p:cNvPr id="1" name=""/>
-        <p:cNvGrpSpPr/>
-        <p:nvPr/>
-      </p:nvGrpSpPr>
-      <p:grpSpPr>
-        <a:xfrm>
-          <a:off x="0" y="0"/>
-          <a:ext cx="0" cy="0"/>
-          <a:chOff x="0" y="0"/>
-          <a:chExt cx="0" cy="0"/>
-        </a:xfrm>
-      </p:grpSpPr>
-      <p:sp>
-        <p:nvSpPr>
-          <p:cNvPr id="2" name="Text 0"/>
-          <p:cNvSpPr/>
-          <p:nvPr/>
-        </p:nvSpPr>
-        <p:spPr>
-          <a:xfrm>
-            <a:off x="548640" y="274320"/>
-            <a:ext cx="11091672" cy="594360"/>
-          </a:xfrm>
-          <a:prstGeom prst="rect">
-            <a:avLst/>
-          </a:prstGeom>
-          <a:noFill/>
-          <a:ln/>
-        </p:spPr>
-        <p:txBody>
-          <a:bodyPr wrap="square" rtlCol="0" anchor="t"/>
-          <a:lstStyle/>
-          <a:p>
-            <a:pPr algn="l" indent="0" marL="0">
-              <a:buNone/>
-            </a:pPr>
-            <a:r>
-              <a:rPr lang="en-US" sz="2600" b="1" dirty="0">
-                <a:solidFill>
-                  <a:srgbClr val="1A1A2E"/>
-                </a:solidFill>
-                <a:latin typeface="游ゴシック" pitchFamily="34" charset="0"/>
-                <a:ea typeface="游ゴシック" pitchFamily="34" charset="-122"/>
-                <a:cs typeface="游ゴシック" pitchFamily="34" charset="-120"/>
-              </a:rPr>
-              <a:t>区民祭り 受注管理（10区）</a:t>
-            </a:r>
-            <a:endParaRPr lang="en-US" sz="2600" dirty="0"/>
-          </a:p>
-        </p:txBody>
-      </p:sp>
-      <p:sp>
-        <p:nvSpPr>
-          <p:cNvPr id="3" name="Shape 1"/>
-          <p:cNvSpPr/>
-          <p:nvPr/>
-        </p:nvSpPr>
-        <p:spPr>
-          <a:xfrm>
-            <a:off x="548640" y="960120"/>
-            <a:ext cx="11091672" cy="36576"/>
-          </a:xfrm>
-          <a:prstGeom prst="rect">
-            <a:avLst/>
-          </a:prstGeom>
-          <a:solidFill>
-            <a:srgbClr val="2563EB"/>
-          </a:solidFill>
-          <a:ln/>
-        </p:spPr>
-      </p:sp>
-      <p:sp>
-        <p:nvSpPr>
-          <p:cNvPr id="4" name="Shape 2"/>
-          <p:cNvSpPr/>
-          <p:nvPr/>
-        </p:nvSpPr>
-        <p:spPr>
-          <a:xfrm>
-            <a:off x="548640" y="1143000"/>
-            <a:ext cx="11091672" cy="365760"/>
-          </a:xfrm>
-          <a:prstGeom prst="rect">
-            <a:avLst/>
-          </a:prstGeom>
-          <a:solidFill>
-            <a:srgbClr val="E8EDF5"/>
-          </a:solidFill>
-          <a:ln/>
-        </p:spPr>
-      </p:sp>
-      <p:sp>
-        <p:nvSpPr>
-          <p:cNvPr id="5" name="Text 3"/>
-          <p:cNvSpPr/>
-          <p:nvPr/>
-        </p:nvSpPr>
-        <p:spPr>
-          <a:xfrm>
-            <a:off x="548640" y="1143000"/>
-            <a:ext cx="1097280" cy="365760"/>
-          </a:xfrm>
-          <a:prstGeom prst="rect">
-            <a:avLst/>
-          </a:prstGeom>
-          <a:noFill/>
-          <a:ln/>
-        </p:spPr>
-        <p:txBody>
-          <a:bodyPr wrap="square" rtlCol="0" anchor="ctr"/>
-          <a:lstStyle/>
-          <a:p>
-            <a:pPr algn="l" indent="0" marL="0">
-              <a:buNone/>
-            </a:pPr>
-            <a:r>
-              <a:rPr lang="en-US" sz="1100" b="1" dirty="0">
-                <a:solidFill>
-                  <a:srgbClr val="6B7280"/>
-                </a:solidFill>
-                <a:latin typeface="游ゴシック" pitchFamily="34" charset="0"/>
-                <a:ea typeface="游ゴシック" pitchFamily="34" charset="-122"/>
-                <a:cs typeface="游ゴシック" pitchFamily="34" charset="-120"/>
-              </a:rPr>
-              <a:t>区</a:t>
-            </a:r>
-            <a:endParaRPr lang="en-US" sz="1100" dirty="0"/>
-          </a:p>
-        </p:txBody>
-      </p:sp>
-      <p:sp>
-        <p:nvSpPr>
-          <p:cNvPr id="6" name="Text 4"/>
-          <p:cNvSpPr/>
-          <p:nvPr/>
-        </p:nvSpPr>
-        <p:spPr>
-          <a:xfrm>
-            <a:off x="1645920" y="1143000"/>
-            <a:ext cx="1005840" cy="365760"/>
-          </a:xfrm>
-          <a:prstGeom prst="rect">
-            <a:avLst/>
-          </a:prstGeom>
-          <a:noFill/>
-          <a:ln/>
-        </p:spPr>
-        <p:txBody>
-          <a:bodyPr wrap="square" rtlCol="0" anchor="ctr"/>
-          <a:lstStyle/>
-          <a:p>
-            <a:pPr algn="ctr" indent="0" marL="0">
-              <a:buNone/>
-            </a:pPr>
-            <a:r>
-              <a:rPr lang="en-US" sz="1100" b="1" dirty="0">
-                <a:solidFill>
-                  <a:srgbClr val="6B7280"/>
-                </a:solidFill>
-                <a:latin typeface="游ゴシック" pitchFamily="34" charset="0"/>
-                <a:ea typeface="游ゴシック" pitchFamily="34" charset="-122"/>
-                <a:cs typeface="游ゴシック" pitchFamily="34" charset="-120"/>
-              </a:rPr>
-              <a:t>本番日</a:t>
-            </a:r>
-            <a:endParaRPr lang="en-US" sz="1100" dirty="0"/>
-          </a:p>
-        </p:txBody>
-      </p:sp>
-      <p:sp>
-        <p:nvSpPr>
-          <p:cNvPr id="7" name="Text 5"/>
-          <p:cNvSpPr/>
-          <p:nvPr/>
-        </p:nvSpPr>
-        <p:spPr>
-          <a:xfrm>
-            <a:off x="2651760" y="1143000"/>
-            <a:ext cx="1280160" cy="365760"/>
-          </a:xfrm>
-          <a:prstGeom prst="rect">
-            <a:avLst/>
-          </a:prstGeom>
-          <a:noFill/>
-          <a:ln/>
-        </p:spPr>
-        <p:txBody>
-          <a:bodyPr wrap="square" rtlCol="0" anchor="ctr"/>
-          <a:lstStyle/>
-          <a:p>
-            <a:pPr algn="ctr" indent="0" marL="0">
-              <a:buNone/>
-            </a:pPr>
-            <a:r>
-              <a:rPr lang="en-US" sz="1100" b="1" dirty="0">
-                <a:solidFill>
-                  <a:srgbClr val="6B7280"/>
-                </a:solidFill>
-                <a:latin typeface="游ゴシック" pitchFamily="34" charset="0"/>
-                <a:ea typeface="游ゴシック" pitchFamily="34" charset="-122"/>
-                <a:cs typeface="游ゴシック" pitchFamily="34" charset="-120"/>
-              </a:rPr>
-              <a:t>入札・見積期限</a:t>
-            </a:r>
-            <a:endParaRPr lang="en-US" sz="1100" dirty="0"/>
-          </a:p>
-        </p:txBody>
-      </p:sp>
-      <p:sp>
-        <p:nvSpPr>
-          <p:cNvPr id="8" name="Text 6"/>
-          <p:cNvSpPr/>
-          <p:nvPr/>
-        </p:nvSpPr>
-        <p:spPr>
-          <a:xfrm>
-            <a:off x="3931920" y="1143000"/>
-            <a:ext cx="4114800" cy="365760"/>
-          </a:xfrm>
-          <a:prstGeom prst="rect">
-            <a:avLst/>
-          </a:prstGeom>
-          <a:noFill/>
-          <a:ln/>
-        </p:spPr>
-        <p:txBody>
-          <a:bodyPr wrap="square" rtlCol="0" anchor="ctr"/>
-          <a:lstStyle/>
-          <a:p>
-            <a:pPr algn="r" indent="0" marL="0">
-              <a:buNone/>
-            </a:pPr>
-            <a:r>
-              <a:rPr lang="en-US" sz="1100" b="1" dirty="0">
-                <a:solidFill>
-                  <a:srgbClr val="6B7280"/>
-                </a:solidFill>
-                <a:latin typeface="游ゴシック" pitchFamily="34" charset="0"/>
-                <a:ea typeface="游ゴシック" pitchFamily="34" charset="-122"/>
-                <a:cs typeface="游ゴシック" pitchFamily="34" charset="-120"/>
-              </a:rPr>
-              <a:t>契約金額（税抜）</a:t>
-            </a:r>
-            <a:endParaRPr lang="en-US" sz="1100" dirty="0"/>
-          </a:p>
-        </p:txBody>
-      </p:sp>
-      <p:sp>
-        <p:nvSpPr>
-          <p:cNvPr id="9" name="Text 7"/>
-          <p:cNvSpPr/>
-          <p:nvPr/>
-        </p:nvSpPr>
-        <p:spPr>
-          <a:xfrm>
-            <a:off x="8046720" y="1143000"/>
-            <a:ext cx="914400" cy="365760"/>
-          </a:xfrm>
-          <a:prstGeom prst="rect">
-            <a:avLst/>
-          </a:prstGeom>
-          <a:noFill/>
-          <a:ln/>
-        </p:spPr>
-        <p:txBody>
-          <a:bodyPr wrap="square" rtlCol="0" anchor="ctr"/>
-          <a:lstStyle/>
-          <a:p>
-            <a:pPr algn="ctr" indent="0" marL="0">
-              <a:buNone/>
-            </a:pPr>
-            <a:r>
-              <a:rPr lang="en-US" sz="1100" b="1" dirty="0">
-                <a:solidFill>
-                  <a:srgbClr val="6B7280"/>
-                </a:solidFill>
-                <a:latin typeface="游ゴシック" pitchFamily="34" charset="0"/>
-                <a:ea typeface="游ゴシック" pitchFamily="34" charset="-122"/>
-                <a:cs typeface="游ゴシック" pitchFamily="34" charset="-120"/>
-              </a:rPr>
-              <a:t>状況</a:t>
-            </a:r>
-            <a:endParaRPr lang="en-US" sz="1100" dirty="0"/>
-          </a:p>
-        </p:txBody>
-      </p:sp>
-      <p:sp>
-        <p:nvSpPr>
-          <p:cNvPr id="10" name="Shape 8"/>
-          <p:cNvSpPr/>
-          <p:nvPr/>
-        </p:nvSpPr>
-        <p:spPr>
-          <a:xfrm>
-            <a:off x="548640" y="1508760"/>
-            <a:ext cx="11091672" cy="365760"/>
-          </a:xfrm>
-          <a:prstGeom prst="rect">
-            <a:avLst/>
-          </a:prstGeom>
-          <a:solidFill>
-            <a:srgbClr val="FFFFFF"/>
-          </a:solidFill>
-          <a:ln/>
-        </p:spPr>
-      </p:sp>
-      <p:sp>
-        <p:nvSpPr>
-          <p:cNvPr id="11" name="Text 9"/>
-          <p:cNvSpPr/>
-          <p:nvPr/>
-        </p:nvSpPr>
-        <p:spPr>
-          <a:xfrm>
-            <a:off x="548640" y="1508760"/>
-            <a:ext cx="1097280" cy="365760"/>
-          </a:xfrm>
-          <a:prstGeom prst="rect">
-            <a:avLst/>
-          </a:prstGeom>
-          <a:noFill/>
-          <a:ln/>
-        </p:spPr>
-        <p:txBody>
-          <a:bodyPr wrap="square" rtlCol="0" anchor="ctr"/>
-          <a:lstStyle/>
-          <a:p>
-            <a:pPr algn="l" indent="0" marL="0">
-              <a:buNone/>
-            </a:pPr>
-            <a:r>
-              <a:rPr lang="en-US" sz="1300" b="1" dirty="0">
-                <a:solidFill>
-                  <a:srgbClr val="1A1A2E"/>
-                </a:solidFill>
-                <a:latin typeface="游ゴシック" pitchFamily="34" charset="0"/>
-                <a:ea typeface="游ゴシック" pitchFamily="34" charset="-122"/>
-                <a:cs typeface="游ゴシック" pitchFamily="34" charset="-120"/>
-              </a:rPr>
-              <a:t>名東区</a:t>
-            </a:r>
-            <a:endParaRPr lang="en-US" sz="1300" dirty="0"/>
-          </a:p>
-        </p:txBody>
-      </p:sp>
-      <p:sp>
-        <p:nvSpPr>
-          <p:cNvPr id="12" name="Text 10"/>
-          <p:cNvSpPr/>
-          <p:nvPr/>
-        </p:nvSpPr>
-        <p:spPr>
-          <a:xfrm>
-            <a:off x="1645920" y="1508760"/>
-            <a:ext cx="1005840" cy="365760"/>
-          </a:xfrm>
-          <a:prstGeom prst="rect">
-            <a:avLst/>
-          </a:prstGeom>
-          <a:noFill/>
-          <a:ln/>
-        </p:spPr>
-        <p:txBody>
-          <a:bodyPr wrap="square" rtlCol="0" anchor="ctr"/>
-          <a:lstStyle/>
-          <a:p>
-            <a:pPr algn="ctr" indent="0" marL="0">
-              <a:buNone/>
-            </a:pPr>
-            <a:r>
-              <a:rPr lang="en-US" sz="1200" b="1" dirty="0">
-                <a:solidFill>
-                  <a:srgbClr val="1A1A2E"/>
-                </a:solidFill>
-                <a:latin typeface="游ゴシック" pitchFamily="34" charset="0"/>
-                <a:ea typeface="游ゴシック" pitchFamily="34" charset="-122"/>
-                <a:cs typeface="游ゴシック" pitchFamily="34" charset="-120"/>
-              </a:rPr>
-              <a:t>5/10</a:t>
-            </a:r>
-            <a:endParaRPr lang="en-US" sz="1200" dirty="0"/>
-          </a:p>
-        </p:txBody>
-      </p:sp>
-      <p:sp>
-        <p:nvSpPr>
-          <p:cNvPr id="13" name="Text 11"/>
-          <p:cNvSpPr/>
-          <p:nvPr/>
-        </p:nvSpPr>
-        <p:spPr>
-          <a:xfrm>
-            <a:off x="2651760" y="1508760"/>
-            <a:ext cx="1280160" cy="365760"/>
-          </a:xfrm>
-          <a:prstGeom prst="rect">
-            <a:avLst/>
-          </a:prstGeom>
-          <a:noFill/>
-          <a:ln/>
-        </p:spPr>
-        <p:txBody>
-          <a:bodyPr wrap="square" rtlCol="0" anchor="ctr"/>
-          <a:lstStyle/>
-          <a:p>
-            <a:pPr algn="ctr" indent="0" marL="0">
-              <a:buNone/>
-            </a:pPr>
-            <a:r>
-              <a:rPr lang="en-US" sz="1200" b="1" dirty="0">
-                <a:solidFill>
-                  <a:srgbClr val="1A1A2E"/>
-                </a:solidFill>
-                <a:latin typeface="游ゴシック" pitchFamily="34" charset="0"/>
-                <a:ea typeface="游ゴシック" pitchFamily="34" charset="-122"/>
-                <a:cs typeface="游ゴシック" pitchFamily="34" charset="-120"/>
-              </a:rPr>
-              <a:t>3月</a:t>
-            </a:r>
-            <a:endParaRPr lang="en-US" sz="1200" dirty="0"/>
-          </a:p>
-        </p:txBody>
-      </p:sp>
-      <p:sp>
-        <p:nvSpPr>
-          <p:cNvPr id="14" name="Text 12"/>
-          <p:cNvSpPr/>
-          <p:nvPr/>
-        </p:nvSpPr>
-        <p:spPr>
-          <a:xfrm>
-            <a:off x="3931920" y="1508760"/>
-            <a:ext cx="4114800" cy="365760"/>
-          </a:xfrm>
-          <a:prstGeom prst="rect">
-            <a:avLst/>
-          </a:prstGeom>
-          <a:noFill/>
-          <a:ln/>
-        </p:spPr>
-        <p:txBody>
-          <a:bodyPr wrap="square" rtlCol="0" anchor="ctr"/>
-          <a:lstStyle/>
-          <a:p>
-            <a:pPr algn="r" indent="0" marL="0">
-              <a:buNone/>
-            </a:pPr>
-            <a:r>
-              <a:rPr lang="en-US" sz="1300" b="1" dirty="0">
-                <a:solidFill>
-                  <a:srgbClr val="1A1A2E"/>
-                </a:solidFill>
-                <a:latin typeface="游ゴシック" pitchFamily="34" charset="0"/>
-                <a:ea typeface="游ゴシック" pitchFamily="34" charset="-122"/>
-                <a:cs typeface="游ゴシック" pitchFamily="34" charset="-120"/>
-              </a:rPr>
-              <a:t>3,300,000</a:t>
-            </a:r>
-            <a:endParaRPr lang="en-US" sz="1300" dirty="0"/>
-          </a:p>
-        </p:txBody>
-      </p:sp>
-      <p:sp>
-        <p:nvSpPr>
-          <p:cNvPr id="15" name="Shape 13"/>
-          <p:cNvSpPr/>
-          <p:nvPr/>
-        </p:nvSpPr>
-        <p:spPr>
-          <a:xfrm>
-            <a:off x="8206740" y="1581912"/>
-            <a:ext cx="594360" cy="219456"/>
-          </a:xfrm>
-          <a:prstGeom prst="rect">
-            <a:avLst/>
-          </a:prstGeom>
-          <a:solidFill>
-            <a:srgbClr val="16A34A"/>
-          </a:solidFill>
-          <a:ln/>
-        </p:spPr>
-      </p:sp>
-      <p:sp>
-        <p:nvSpPr>
-          <p:cNvPr id="16" name="Text 14"/>
-          <p:cNvSpPr/>
-          <p:nvPr/>
-        </p:nvSpPr>
-        <p:spPr>
-          <a:xfrm>
-            <a:off x="8206740" y="1581912"/>
-            <a:ext cx="594360" cy="219456"/>
-          </a:xfrm>
-          <a:prstGeom prst="rect">
-            <a:avLst/>
-          </a:prstGeom>
-          <a:noFill/>
-          <a:ln/>
-        </p:spPr>
-        <p:txBody>
-          <a:bodyPr wrap="square" rtlCol="0" anchor="ctr"/>
-          <a:lstStyle/>
-          <a:p>
-            <a:pPr algn="ctr" indent="0" marL="0">
-              <a:buNone/>
-            </a:pPr>
-            <a:r>
-              <a:rPr lang="en-US" sz="1000" b="1" dirty="0">
-                <a:solidFill>
-                  <a:srgbClr val="FFFFFF"/>
-                </a:solidFill>
-                <a:latin typeface="游ゴシック" pitchFamily="34" charset="0"/>
-                <a:ea typeface="游ゴシック" pitchFamily="34" charset="-122"/>
-                <a:cs typeface="游ゴシック" pitchFamily="34" charset="-120"/>
-              </a:rPr>
-              <a:t>確定</a:t>
-            </a:r>
-            <a:endParaRPr lang="en-US" sz="1000" dirty="0"/>
-          </a:p>
-        </p:txBody>
-      </p:sp>
-      <p:sp>
-        <p:nvSpPr>
-          <p:cNvPr id="17" name="Shape 15"/>
-          <p:cNvSpPr/>
-          <p:nvPr/>
-        </p:nvSpPr>
-        <p:spPr>
-          <a:xfrm>
-            <a:off x="548640" y="1874520"/>
-            <a:ext cx="11091672" cy="365760"/>
-          </a:xfrm>
-          <a:prstGeom prst="rect">
-            <a:avLst/>
-          </a:prstGeom>
-          <a:solidFill>
-            <a:srgbClr val="F5F7FA"/>
-          </a:solidFill>
-          <a:ln/>
-        </p:spPr>
-      </p:sp>
-      <p:sp>
-        <p:nvSpPr>
-          <p:cNvPr id="18" name="Text 16"/>
-          <p:cNvSpPr/>
-          <p:nvPr/>
-        </p:nvSpPr>
-        <p:spPr>
-          <a:xfrm>
-            <a:off x="548640" y="1874520"/>
-            <a:ext cx="1097280" cy="365760"/>
-          </a:xfrm>
-          <a:prstGeom prst="rect">
-            <a:avLst/>
-          </a:prstGeom>
-          <a:noFill/>
-          <a:ln/>
-        </p:spPr>
-        <p:txBody>
-          <a:bodyPr wrap="square" rtlCol="0" anchor="ctr"/>
-          <a:lstStyle/>
-          <a:p>
-            <a:pPr algn="l" indent="0" marL="0">
-              <a:buNone/>
-            </a:pPr>
-            <a:r>
-              <a:rPr lang="en-US" sz="1300" b="1" dirty="0">
-                <a:solidFill>
-                  <a:srgbClr val="1A1A2E"/>
-                </a:solidFill>
-                <a:latin typeface="游ゴシック" pitchFamily="34" charset="0"/>
-                <a:ea typeface="游ゴシック" pitchFamily="34" charset="-122"/>
-                <a:cs typeface="游ゴシック" pitchFamily="34" charset="-120"/>
-              </a:rPr>
-              <a:t>中村区</a:t>
-            </a:r>
-            <a:endParaRPr lang="en-US" sz="1300" dirty="0"/>
-          </a:p>
-        </p:txBody>
-      </p:sp>
-      <p:sp>
-        <p:nvSpPr>
-          <p:cNvPr id="19" name="Text 17"/>
-          <p:cNvSpPr/>
-          <p:nvPr/>
-        </p:nvSpPr>
-        <p:spPr>
-          <a:xfrm>
-            <a:off x="1645920" y="1874520"/>
-            <a:ext cx="1005840" cy="365760"/>
-          </a:xfrm>
-          <a:prstGeom prst="rect">
-            <a:avLst/>
-          </a:prstGeom>
-          <a:noFill/>
-          <a:ln/>
-        </p:spPr>
-        <p:txBody>
-          <a:bodyPr wrap="square" rtlCol="0" anchor="ctr"/>
-          <a:lstStyle/>
-          <a:p>
-            <a:pPr algn="ctr" indent="0" marL="0">
-              <a:buNone/>
-            </a:pPr>
-            <a:r>
-              <a:rPr lang="en-US" sz="1200" b="1" dirty="0">
-                <a:solidFill>
-                  <a:srgbClr val="1A1A2E"/>
-                </a:solidFill>
-                <a:latin typeface="游ゴシック" pitchFamily="34" charset="0"/>
-                <a:ea typeface="游ゴシック" pitchFamily="34" charset="-122"/>
-                <a:cs typeface="游ゴシック" pitchFamily="34" charset="-120"/>
-              </a:rPr>
-              <a:t>10/31</a:t>
-            </a:r>
-            <a:endParaRPr lang="en-US" sz="1200" dirty="0"/>
-          </a:p>
-        </p:txBody>
-      </p:sp>
-      <p:sp>
-        <p:nvSpPr>
-          <p:cNvPr id="20" name="Text 18"/>
-          <p:cNvSpPr/>
-          <p:nvPr/>
-        </p:nvSpPr>
-        <p:spPr>
-          <a:xfrm>
-            <a:off x="2651760" y="1874520"/>
-            <a:ext cx="1280160" cy="365760"/>
-          </a:xfrm>
-          <a:prstGeom prst="rect">
-            <a:avLst/>
-          </a:prstGeom>
-          <a:noFill/>
-          <a:ln/>
-        </p:spPr>
-        <p:txBody>
-          <a:bodyPr wrap="square" rtlCol="0" anchor="ctr"/>
-          <a:lstStyle/>
-          <a:p>
-            <a:pPr algn="ctr" indent="0" marL="0">
-              <a:buNone/>
-            </a:pPr>
-            <a:r>
-              <a:rPr lang="en-US" sz="1200" b="1" dirty="0">
-                <a:solidFill>
-                  <a:srgbClr val="1A1A2E"/>
-                </a:solidFill>
-                <a:latin typeface="游ゴシック" pitchFamily="34" charset="0"/>
-                <a:ea typeface="游ゴシック" pitchFamily="34" charset="-122"/>
-                <a:cs typeface="游ゴシック" pitchFamily="34" charset="-120"/>
-              </a:rPr>
-              <a:t>5月</a:t>
-            </a:r>
-            <a:endParaRPr lang="en-US" sz="1200" dirty="0"/>
-          </a:p>
-        </p:txBody>
-      </p:sp>
-      <p:sp>
-        <p:nvSpPr>
-          <p:cNvPr id="21" name="Text 19"/>
-          <p:cNvSpPr/>
-          <p:nvPr/>
-        </p:nvSpPr>
-        <p:spPr>
-          <a:xfrm>
-            <a:off x="3931920" y="1874520"/>
-            <a:ext cx="4114800" cy="365760"/>
-          </a:xfrm>
-          <a:prstGeom prst="rect">
-            <a:avLst/>
-          </a:prstGeom>
-          <a:noFill/>
-          <a:ln/>
-        </p:spPr>
-        <p:txBody>
-          <a:bodyPr wrap="square" rtlCol="0" anchor="ctr"/>
-          <a:lstStyle/>
-          <a:p>
-            <a:pPr algn="r" indent="0" marL="0">
-              <a:buNone/>
-            </a:pPr>
-            <a:r>
-              <a:rPr lang="en-US" sz="1300" b="1" dirty="0">
-                <a:solidFill>
-                  <a:srgbClr val="1A1A2E"/>
-                </a:solidFill>
-                <a:latin typeface="游ゴシック" pitchFamily="34" charset="0"/>
-                <a:ea typeface="游ゴシック" pitchFamily="34" charset="-122"/>
-                <a:cs typeface="游ゴシック" pitchFamily="34" charset="-120"/>
-              </a:rPr>
-              <a:t>5,500,000</a:t>
-            </a:r>
-            <a:endParaRPr lang="en-US" sz="1300" dirty="0"/>
-          </a:p>
-        </p:txBody>
-      </p:sp>
-      <p:sp>
-        <p:nvSpPr>
-          <p:cNvPr id="22" name="Shape 20"/>
-          <p:cNvSpPr/>
-          <p:nvPr/>
-        </p:nvSpPr>
-        <p:spPr>
-          <a:xfrm>
-            <a:off x="8206740" y="1947672"/>
-            <a:ext cx="594360" cy="219456"/>
-          </a:xfrm>
-          <a:prstGeom prst="rect">
-            <a:avLst/>
-          </a:prstGeom>
-          <a:solidFill>
-            <a:srgbClr val="16A34A"/>
-          </a:solidFill>
-          <a:ln/>
-        </p:spPr>
-      </p:sp>
-      <p:sp>
-        <p:nvSpPr>
-          <p:cNvPr id="23" name="Text 21"/>
-          <p:cNvSpPr/>
-          <p:nvPr/>
-        </p:nvSpPr>
-        <p:spPr>
-          <a:xfrm>
-            <a:off x="8206740" y="1947672"/>
-            <a:ext cx="594360" cy="219456"/>
-          </a:xfrm>
-          <a:prstGeom prst="rect">
-            <a:avLst/>
-          </a:prstGeom>
-          <a:noFill/>
-          <a:ln/>
-        </p:spPr>
-        <p:txBody>
-          <a:bodyPr wrap="square" rtlCol="0" anchor="ctr"/>
-          <a:lstStyle/>
-          <a:p>
-            <a:pPr algn="ctr" indent="0" marL="0">
-              <a:buNone/>
-            </a:pPr>
-            <a:r>
-              <a:rPr lang="en-US" sz="1000" b="1" dirty="0">
-                <a:solidFill>
-                  <a:srgbClr val="FFFFFF"/>
-                </a:solidFill>
-                <a:latin typeface="游ゴシック" pitchFamily="34" charset="0"/>
-                <a:ea typeface="游ゴシック" pitchFamily="34" charset="-122"/>
-                <a:cs typeface="游ゴシック" pitchFamily="34" charset="-120"/>
-              </a:rPr>
-              <a:t>確定</a:t>
-            </a:r>
-            <a:endParaRPr lang="en-US" sz="1000" dirty="0"/>
-          </a:p>
-        </p:txBody>
-      </p:sp>
-      <p:sp>
-        <p:nvSpPr>
-          <p:cNvPr id="24" name="Shape 22"/>
-          <p:cNvSpPr/>
-          <p:nvPr/>
-        </p:nvSpPr>
-        <p:spPr>
-          <a:xfrm>
-            <a:off x="548640" y="2240280"/>
-            <a:ext cx="11091672" cy="365760"/>
-          </a:xfrm>
-          <a:prstGeom prst="rect">
-            <a:avLst/>
-          </a:prstGeom>
-          <a:solidFill>
-            <a:srgbClr val="FFFFFF"/>
-          </a:solidFill>
-          <a:ln/>
-        </p:spPr>
-      </p:sp>
-      <p:sp>
-        <p:nvSpPr>
-          <p:cNvPr id="25" name="Text 23"/>
-          <p:cNvSpPr/>
-          <p:nvPr/>
-        </p:nvSpPr>
-        <p:spPr>
-          <a:xfrm>
-            <a:off x="548640" y="2240280"/>
-            <a:ext cx="1097280" cy="365760"/>
-          </a:xfrm>
-          <a:prstGeom prst="rect">
-            <a:avLst/>
-          </a:prstGeom>
-          <a:noFill/>
-          <a:ln/>
-        </p:spPr>
-        <p:txBody>
-          <a:bodyPr wrap="square" rtlCol="0" anchor="ctr"/>
-          <a:lstStyle/>
-          <a:p>
-            <a:pPr algn="l" indent="0" marL="0">
-              <a:buNone/>
-            </a:pPr>
-            <a:r>
-              <a:rPr lang="en-US" sz="1300" b="1" dirty="0">
-                <a:solidFill>
-                  <a:srgbClr val="1A1A2E"/>
-                </a:solidFill>
-                <a:latin typeface="游ゴシック" pitchFamily="34" charset="0"/>
-                <a:ea typeface="游ゴシック" pitchFamily="34" charset="-122"/>
-                <a:cs typeface="游ゴシック" pitchFamily="34" charset="-120"/>
-              </a:rPr>
-              <a:t>瑞穂区</a:t>
-            </a:r>
-            <a:endParaRPr lang="en-US" sz="1300" dirty="0"/>
-          </a:p>
-        </p:txBody>
-      </p:sp>
-      <p:sp>
-        <p:nvSpPr>
-          <p:cNvPr id="26" name="Text 24"/>
-          <p:cNvSpPr/>
-          <p:nvPr/>
-        </p:nvSpPr>
-        <p:spPr>
-          <a:xfrm>
-            <a:off x="1645920" y="2240280"/>
-            <a:ext cx="1005840" cy="365760"/>
-          </a:xfrm>
-          <a:prstGeom prst="rect">
-            <a:avLst/>
-          </a:prstGeom>
-          <a:noFill/>
-          <a:ln/>
-        </p:spPr>
-        <p:txBody>
-          <a:bodyPr wrap="square" rtlCol="0" anchor="ctr"/>
-          <a:lstStyle/>
-          <a:p>
-            <a:pPr algn="ctr" indent="0" marL="0">
-              <a:buNone/>
-            </a:pPr>
-            <a:r>
-              <a:rPr lang="en-US" sz="1200" b="1" dirty="0">
-                <a:solidFill>
-                  <a:srgbClr val="1A1A2E"/>
-                </a:solidFill>
-                <a:latin typeface="游ゴシック" pitchFamily="34" charset="0"/>
-                <a:ea typeface="游ゴシック" pitchFamily="34" charset="-122"/>
-                <a:cs typeface="游ゴシック" pitchFamily="34" charset="-120"/>
-              </a:rPr>
-              <a:t>11/7</a:t>
-            </a:r>
-            <a:endParaRPr lang="en-US" sz="1200" dirty="0"/>
-          </a:p>
-        </p:txBody>
-      </p:sp>
-      <p:sp>
-        <p:nvSpPr>
-          <p:cNvPr id="27" name="Text 25"/>
-          <p:cNvSpPr/>
-          <p:nvPr/>
-        </p:nvSpPr>
-        <p:spPr>
-          <a:xfrm>
-            <a:off x="2651760" y="2240280"/>
-            <a:ext cx="1280160" cy="365760"/>
-          </a:xfrm>
-          <a:prstGeom prst="rect">
-            <a:avLst/>
-          </a:prstGeom>
-          <a:noFill/>
-          <a:ln/>
-        </p:spPr>
-        <p:txBody>
-          <a:bodyPr wrap="square" rtlCol="0" anchor="ctr"/>
-          <a:lstStyle/>
-          <a:p>
-            <a:pPr algn="ctr" indent="0" marL="0">
-              <a:buNone/>
-            </a:pPr>
-            <a:r>
-              <a:rPr lang="en-US" sz="1200" b="1" dirty="0">
-                <a:solidFill>
-                  <a:srgbClr val="1A1A2E"/>
-                </a:solidFill>
-                <a:latin typeface="游ゴシック" pitchFamily="34" charset="0"/>
-                <a:ea typeface="游ゴシック" pitchFamily="34" charset="-122"/>
-                <a:cs typeface="游ゴシック" pitchFamily="34" charset="-120"/>
-              </a:rPr>
-              <a:t>7月</a:t>
-            </a:r>
-            <a:endParaRPr lang="en-US" sz="1200" dirty="0"/>
-          </a:p>
-        </p:txBody>
-      </p:sp>
-      <p:sp>
-        <p:nvSpPr>
-          <p:cNvPr id="28" name="Text 26"/>
-          <p:cNvSpPr/>
-          <p:nvPr/>
-        </p:nvSpPr>
-        <p:spPr>
-          <a:xfrm>
-            <a:off x="3931920" y="2240280"/>
-            <a:ext cx="4114800" cy="365760"/>
-          </a:xfrm>
-          <a:prstGeom prst="rect">
-            <a:avLst/>
-          </a:prstGeom>
-          <a:noFill/>
-          <a:ln/>
-        </p:spPr>
-        <p:txBody>
-          <a:bodyPr wrap="square" rtlCol="0" anchor="ctr"/>
-          <a:lstStyle/>
-          <a:p>
-            <a:pPr algn="r" indent="0" marL="0">
-              <a:buNone/>
-            </a:pPr>
-            <a:r>
-              <a:rPr lang="en-US" sz="1300" b="1" dirty="0">
-                <a:solidFill>
-                  <a:srgbClr val="1A1A2E"/>
-                </a:solidFill>
-                <a:latin typeface="游ゴシック" pitchFamily="34" charset="0"/>
-                <a:ea typeface="游ゴシック" pitchFamily="34" charset="-122"/>
-                <a:cs typeface="游ゴシック" pitchFamily="34" charset="-120"/>
-              </a:rPr>
-              <a:t>4,000,000</a:t>
-            </a:r>
-            <a:endParaRPr lang="en-US" sz="1300" dirty="0"/>
-          </a:p>
-        </p:txBody>
-      </p:sp>
-      <p:sp>
-        <p:nvSpPr>
-          <p:cNvPr id="29" name="Shape 27"/>
-          <p:cNvSpPr/>
-          <p:nvPr/>
-        </p:nvSpPr>
-        <p:spPr>
-          <a:xfrm>
-            <a:off x="8206740" y="2313432"/>
-            <a:ext cx="594360" cy="219456"/>
-          </a:xfrm>
-          <a:prstGeom prst="rect">
-            <a:avLst/>
-          </a:prstGeom>
-          <a:solidFill>
-            <a:srgbClr val="E5E7EB"/>
-          </a:solidFill>
-          <a:ln/>
-        </p:spPr>
-      </p:sp>
-      <p:sp>
-        <p:nvSpPr>
-          <p:cNvPr id="30" name="Text 28"/>
-          <p:cNvSpPr/>
-          <p:nvPr/>
-        </p:nvSpPr>
-        <p:spPr>
-          <a:xfrm>
-            <a:off x="8206740" y="2313432"/>
-            <a:ext cx="594360" cy="219456"/>
-          </a:xfrm>
-          <a:prstGeom prst="rect">
-            <a:avLst/>
-          </a:prstGeom>
-          <a:noFill/>
-          <a:ln/>
-        </p:spPr>
-        <p:txBody>
-          <a:bodyPr wrap="square" rtlCol="0" anchor="ctr"/>
-          <a:lstStyle/>
-          <a:p>
-            <a:pPr algn="ctr" indent="0" marL="0">
-              <a:buNone/>
-            </a:pPr>
-            <a:r>
-              <a:rPr lang="en-US" sz="1000" b="1" dirty="0">
-                <a:solidFill>
-                  <a:srgbClr val="6B7280"/>
-                </a:solidFill>
-                <a:latin typeface="游ゴシック" pitchFamily="34" charset="0"/>
-                <a:ea typeface="游ゴシック" pitchFamily="34" charset="-122"/>
-                <a:cs typeface="游ゴシック" pitchFamily="34" charset="-120"/>
-              </a:rPr>
-              <a:t>未</a:t>
-            </a:r>
-            <a:endParaRPr lang="en-US" sz="1000" dirty="0"/>
-          </a:p>
-        </p:txBody>
-      </p:sp>
-      <p:sp>
-        <p:nvSpPr>
-          <p:cNvPr id="31" name="Shape 29"/>
-          <p:cNvSpPr/>
-          <p:nvPr/>
-        </p:nvSpPr>
-        <p:spPr>
-          <a:xfrm>
-            <a:off x="548640" y="2606040"/>
-            <a:ext cx="11091672" cy="365760"/>
-          </a:xfrm>
-          <a:prstGeom prst="rect">
-            <a:avLst/>
-          </a:prstGeom>
-          <a:solidFill>
-            <a:srgbClr val="F5F7FA"/>
-          </a:solidFill>
-          <a:ln/>
-        </p:spPr>
-      </p:sp>
-      <p:sp>
-        <p:nvSpPr>
-          <p:cNvPr id="32" name="Text 30"/>
-          <p:cNvSpPr/>
-          <p:nvPr/>
-        </p:nvSpPr>
-        <p:spPr>
-          <a:xfrm>
-            <a:off x="548640" y="2606040"/>
-            <a:ext cx="1097280" cy="365760"/>
-          </a:xfrm>
-          <a:prstGeom prst="rect">
-            <a:avLst/>
-          </a:prstGeom>
-          <a:noFill/>
-          <a:ln/>
-        </p:spPr>
-        <p:txBody>
-          <a:bodyPr wrap="square" rtlCol="0" anchor="ctr"/>
-          <a:lstStyle/>
-          <a:p>
-            <a:pPr algn="l" indent="0" marL="0">
-              <a:buNone/>
-            </a:pPr>
-            <a:r>
-              <a:rPr lang="en-US" sz="1300" b="1" dirty="0">
-                <a:solidFill>
-                  <a:srgbClr val="1A1A2E"/>
-                </a:solidFill>
-                <a:latin typeface="游ゴシック" pitchFamily="34" charset="0"/>
-                <a:ea typeface="游ゴシック" pitchFamily="34" charset="-122"/>
-                <a:cs typeface="游ゴシック" pitchFamily="34" charset="-120"/>
-              </a:rPr>
-              <a:t>東区</a:t>
-            </a:r>
-            <a:endParaRPr lang="en-US" sz="1300" dirty="0"/>
-          </a:p>
-        </p:txBody>
-      </p:sp>
-      <p:sp>
-        <p:nvSpPr>
-          <p:cNvPr id="33" name="Text 31"/>
-          <p:cNvSpPr/>
-          <p:nvPr/>
-        </p:nvSpPr>
-        <p:spPr>
-          <a:xfrm>
-            <a:off x="1645920" y="2606040"/>
-            <a:ext cx="1005840" cy="365760"/>
-          </a:xfrm>
-          <a:prstGeom prst="rect">
-            <a:avLst/>
-          </a:prstGeom>
-          <a:noFill/>
-          <a:ln/>
-        </p:spPr>
-        <p:txBody>
-          <a:bodyPr wrap="square" rtlCol="0" anchor="ctr"/>
-          <a:lstStyle/>
-          <a:p>
-            <a:pPr algn="ctr" indent="0" marL="0">
-              <a:buNone/>
-            </a:pPr>
-            <a:r>
-              <a:rPr lang="en-US" sz="1200" b="1" dirty="0">
-                <a:solidFill>
-                  <a:srgbClr val="1A1A2E"/>
-                </a:solidFill>
-                <a:latin typeface="游ゴシック" pitchFamily="34" charset="0"/>
-                <a:ea typeface="游ゴシック" pitchFamily="34" charset="-122"/>
-                <a:cs typeface="游ゴシック" pitchFamily="34" charset="-120"/>
-              </a:rPr>
-              <a:t>11/8</a:t>
-            </a:r>
-            <a:endParaRPr lang="en-US" sz="1200" dirty="0"/>
-          </a:p>
-        </p:txBody>
-      </p:sp>
-      <p:sp>
-        <p:nvSpPr>
-          <p:cNvPr id="34" name="Text 32"/>
-          <p:cNvSpPr/>
-          <p:nvPr/>
-        </p:nvSpPr>
-        <p:spPr>
-          <a:xfrm>
-            <a:off x="2651760" y="2606040"/>
-            <a:ext cx="1280160" cy="365760"/>
-          </a:xfrm>
-          <a:prstGeom prst="rect">
-            <a:avLst/>
-          </a:prstGeom>
-          <a:noFill/>
-          <a:ln/>
-        </p:spPr>
-        <p:txBody>
-          <a:bodyPr wrap="square" rtlCol="0" anchor="ctr"/>
-          <a:lstStyle/>
-          <a:p>
-            <a:pPr algn="ctr" indent="0" marL="0">
-              <a:buNone/>
-            </a:pPr>
-            <a:r>
-              <a:rPr lang="en-US" sz="1200" b="1" dirty="0">
-                <a:solidFill>
-                  <a:srgbClr val="1A1A2E"/>
-                </a:solidFill>
-                <a:latin typeface="游ゴシック" pitchFamily="34" charset="0"/>
-                <a:ea typeface="游ゴシック" pitchFamily="34" charset="-122"/>
-                <a:cs typeface="游ゴシック" pitchFamily="34" charset="-120"/>
-              </a:rPr>
-              <a:t>7月</a:t>
-            </a:r>
-            <a:endParaRPr lang="en-US" sz="1200" dirty="0"/>
-          </a:p>
-        </p:txBody>
-      </p:sp>
-      <p:sp>
-        <p:nvSpPr>
-          <p:cNvPr id="35" name="Text 33"/>
-          <p:cNvSpPr/>
-          <p:nvPr/>
-        </p:nvSpPr>
-        <p:spPr>
-          <a:xfrm>
-            <a:off x="3931920" y="2606040"/>
-            <a:ext cx="4114800" cy="365760"/>
-          </a:xfrm>
-          <a:prstGeom prst="rect">
-            <a:avLst/>
-          </a:prstGeom>
-          <a:noFill/>
-          <a:ln/>
-        </p:spPr>
-        <p:txBody>
-          <a:bodyPr wrap="square" rtlCol="0" anchor="ctr"/>
-          <a:lstStyle/>
-          <a:p>
-            <a:pPr algn="r" indent="0" marL="0">
-              <a:buNone/>
-            </a:pPr>
-            <a:r>
-              <a:rPr lang="en-US" sz="1300" b="1" dirty="0">
-                <a:solidFill>
-                  <a:srgbClr val="1A1A2E"/>
-                </a:solidFill>
-                <a:latin typeface="游ゴシック" pitchFamily="34" charset="0"/>
-                <a:ea typeface="游ゴシック" pitchFamily="34" charset="-122"/>
-                <a:cs typeface="游ゴシック" pitchFamily="34" charset="-120"/>
-              </a:rPr>
-              <a:t>4,930,000</a:t>
-            </a:r>
-            <a:endParaRPr lang="en-US" sz="1300" dirty="0"/>
-          </a:p>
-        </p:txBody>
-      </p:sp>
-      <p:sp>
-        <p:nvSpPr>
-          <p:cNvPr id="36" name="Shape 34"/>
-          <p:cNvSpPr/>
-          <p:nvPr/>
-        </p:nvSpPr>
-        <p:spPr>
-          <a:xfrm>
-            <a:off x="8206740" y="2679192"/>
-            <a:ext cx="594360" cy="219456"/>
-          </a:xfrm>
-          <a:prstGeom prst="rect">
-            <a:avLst/>
-          </a:prstGeom>
-          <a:solidFill>
-            <a:srgbClr val="E5E7EB"/>
-          </a:solidFill>
-          <a:ln/>
-        </p:spPr>
-      </p:sp>
-      <p:sp>
-        <p:nvSpPr>
-          <p:cNvPr id="37" name="Text 35"/>
-          <p:cNvSpPr/>
-          <p:nvPr/>
-        </p:nvSpPr>
-        <p:spPr>
-          <a:xfrm>
-            <a:off x="8206740" y="2679192"/>
-            <a:ext cx="594360" cy="219456"/>
-          </a:xfrm>
-          <a:prstGeom prst="rect">
-            <a:avLst/>
-          </a:prstGeom>
-          <a:noFill/>
-          <a:ln/>
-        </p:spPr>
-        <p:txBody>
-          <a:bodyPr wrap="square" rtlCol="0" anchor="ctr"/>
-          <a:lstStyle/>
-          <a:p>
-            <a:pPr algn="ctr" indent="0" marL="0">
-              <a:buNone/>
-            </a:pPr>
-            <a:r>
-              <a:rPr lang="en-US" sz="1000" b="1" dirty="0">
-                <a:solidFill>
-                  <a:srgbClr val="6B7280"/>
-                </a:solidFill>
-                <a:latin typeface="游ゴシック" pitchFamily="34" charset="0"/>
-                <a:ea typeface="游ゴシック" pitchFamily="34" charset="-122"/>
-                <a:cs typeface="游ゴシック" pitchFamily="34" charset="-120"/>
-              </a:rPr>
-              <a:t>未</a:t>
-            </a:r>
-            <a:endParaRPr lang="en-US" sz="1000" dirty="0"/>
-          </a:p>
-        </p:txBody>
-      </p:sp>
-      <p:sp>
-        <p:nvSpPr>
-          <p:cNvPr id="38" name="Shape 36"/>
-          <p:cNvSpPr/>
-          <p:nvPr/>
-        </p:nvSpPr>
-        <p:spPr>
-          <a:xfrm>
-            <a:off x="548640" y="2971800"/>
-            <a:ext cx="11091672" cy="365760"/>
-          </a:xfrm>
-          <a:prstGeom prst="rect">
-            <a:avLst/>
-          </a:prstGeom>
-          <a:solidFill>
-            <a:srgbClr val="FFFFFF"/>
-          </a:solidFill>
-          <a:ln/>
-        </p:spPr>
-      </p:sp>
-      <p:sp>
-        <p:nvSpPr>
-          <p:cNvPr id="39" name="Text 37"/>
-          <p:cNvSpPr/>
-          <p:nvPr/>
-        </p:nvSpPr>
-        <p:spPr>
-          <a:xfrm>
-            <a:off x="548640" y="2971800"/>
-            <a:ext cx="1097280" cy="365760"/>
-          </a:xfrm>
-          <a:prstGeom prst="rect">
-            <a:avLst/>
-          </a:prstGeom>
-          <a:noFill/>
-          <a:ln/>
-        </p:spPr>
-        <p:txBody>
-          <a:bodyPr wrap="square" rtlCol="0" anchor="ctr"/>
-          <a:lstStyle/>
-          <a:p>
-            <a:pPr algn="l" indent="0" marL="0">
-              <a:buNone/>
-            </a:pPr>
-            <a:r>
-              <a:rPr lang="en-US" sz="1300" b="1" dirty="0">
-                <a:solidFill>
-                  <a:srgbClr val="1A1A2E"/>
-                </a:solidFill>
-                <a:latin typeface="游ゴシック" pitchFamily="34" charset="0"/>
-                <a:ea typeface="游ゴシック" pitchFamily="34" charset="-122"/>
-                <a:cs typeface="游ゴシック" pitchFamily="34" charset="-120"/>
-              </a:rPr>
-              <a:t>昭和区</a:t>
-            </a:r>
-            <a:endParaRPr lang="en-US" sz="1300" dirty="0"/>
-          </a:p>
-        </p:txBody>
-      </p:sp>
-      <p:sp>
-        <p:nvSpPr>
-          <p:cNvPr id="40" name="Text 38"/>
-          <p:cNvSpPr/>
-          <p:nvPr/>
-        </p:nvSpPr>
-        <p:spPr>
-          <a:xfrm>
-            <a:off x="1645920" y="2971800"/>
-            <a:ext cx="1005840" cy="365760"/>
-          </a:xfrm>
-          <a:prstGeom prst="rect">
-            <a:avLst/>
-          </a:prstGeom>
-          <a:noFill/>
-          <a:ln/>
-        </p:spPr>
-        <p:txBody>
-          <a:bodyPr wrap="square" rtlCol="0" anchor="ctr"/>
-          <a:lstStyle/>
-          <a:p>
-            <a:pPr algn="ctr" indent="0" marL="0">
-              <a:buNone/>
-            </a:pPr>
-            <a:r>
-              <a:rPr lang="en-US" sz="1200" b="1" dirty="0">
-                <a:solidFill>
-                  <a:srgbClr val="1A1A2E"/>
-                </a:solidFill>
-                <a:latin typeface="游ゴシック" pitchFamily="34" charset="0"/>
-                <a:ea typeface="游ゴシック" pitchFamily="34" charset="-122"/>
-                <a:cs typeface="游ゴシック" pitchFamily="34" charset="-120"/>
-              </a:rPr>
-              <a:t>11/15</a:t>
-            </a:r>
-            <a:endParaRPr lang="en-US" sz="1200" dirty="0"/>
-          </a:p>
-        </p:txBody>
-      </p:sp>
-      <p:sp>
-        <p:nvSpPr>
-          <p:cNvPr id="41" name="Text 39"/>
-          <p:cNvSpPr/>
-          <p:nvPr/>
-        </p:nvSpPr>
-        <p:spPr>
-          <a:xfrm>
-            <a:off x="2651760" y="2971800"/>
-            <a:ext cx="1280160" cy="365760"/>
-          </a:xfrm>
-          <a:prstGeom prst="rect">
-            <a:avLst/>
-          </a:prstGeom>
-          <a:noFill/>
-          <a:ln/>
-        </p:spPr>
-        <p:txBody>
-          <a:bodyPr wrap="square" rtlCol="0" anchor="ctr"/>
-          <a:lstStyle/>
-          <a:p>
-            <a:pPr algn="ctr" indent="0" marL="0">
-              <a:buNone/>
-            </a:pPr>
-            <a:r>
-              <a:rPr lang="en-US" sz="1200" b="1" dirty="0">
-                <a:solidFill>
-                  <a:srgbClr val="1A1A2E"/>
-                </a:solidFill>
-                <a:latin typeface="游ゴシック" pitchFamily="34" charset="0"/>
-                <a:ea typeface="游ゴシック" pitchFamily="34" charset="-122"/>
-                <a:cs typeface="游ゴシック" pitchFamily="34" charset="-120"/>
-              </a:rPr>
-              <a:t>7月</a:t>
-            </a:r>
-            <a:endParaRPr lang="en-US" sz="1200" dirty="0"/>
-          </a:p>
-        </p:txBody>
-      </p:sp>
-      <p:sp>
-        <p:nvSpPr>
-          <p:cNvPr id="42" name="Text 40"/>
-          <p:cNvSpPr/>
-          <p:nvPr/>
-        </p:nvSpPr>
-        <p:spPr>
-          <a:xfrm>
-            <a:off x="3931920" y="2971800"/>
-            <a:ext cx="4114800" cy="365760"/>
-          </a:xfrm>
-          <a:prstGeom prst="rect">
-            <a:avLst/>
-          </a:prstGeom>
-          <a:noFill/>
-          <a:ln/>
-        </p:spPr>
-        <p:txBody>
-          <a:bodyPr wrap="square" rtlCol="0" anchor="ctr"/>
-          <a:lstStyle/>
-          <a:p>
-            <a:pPr algn="r" indent="0" marL="0">
-              <a:buNone/>
-            </a:pPr>
-            <a:r>
-              <a:rPr lang="en-US" sz="1300" b="1" dirty="0">
-                <a:solidFill>
-                  <a:srgbClr val="1A1A2E"/>
-                </a:solidFill>
-                <a:latin typeface="游ゴシック" pitchFamily="34" charset="0"/>
-                <a:ea typeface="游ゴシック" pitchFamily="34" charset="-122"/>
-                <a:cs typeface="游ゴシック" pitchFamily="34" charset="-120"/>
-              </a:rPr>
-              <a:t>4,300,000</a:t>
-            </a:r>
-            <a:endParaRPr lang="en-US" sz="1300" dirty="0"/>
-          </a:p>
-        </p:txBody>
-      </p:sp>
-      <p:sp>
-        <p:nvSpPr>
-          <p:cNvPr id="43" name="Shape 41"/>
-          <p:cNvSpPr/>
-          <p:nvPr/>
-        </p:nvSpPr>
-        <p:spPr>
-          <a:xfrm>
-            <a:off x="8206740" y="3044952"/>
-            <a:ext cx="594360" cy="219456"/>
-          </a:xfrm>
-          <a:prstGeom prst="rect">
-            <a:avLst/>
-          </a:prstGeom>
-          <a:solidFill>
-            <a:srgbClr val="E5E7EB"/>
-          </a:solidFill>
-          <a:ln/>
-        </p:spPr>
-      </p:sp>
-      <p:sp>
-        <p:nvSpPr>
-          <p:cNvPr id="44" name="Text 42"/>
-          <p:cNvSpPr/>
-          <p:nvPr/>
-        </p:nvSpPr>
-        <p:spPr>
-          <a:xfrm>
-            <a:off x="8206740" y="3044952"/>
-            <a:ext cx="594360" cy="219456"/>
-          </a:xfrm>
-          <a:prstGeom prst="rect">
-            <a:avLst/>
-          </a:prstGeom>
-          <a:noFill/>
-          <a:ln/>
-        </p:spPr>
-        <p:txBody>
-          <a:bodyPr wrap="square" rtlCol="0" anchor="ctr"/>
-          <a:lstStyle/>
-          <a:p>
-            <a:pPr algn="ctr" indent="0" marL="0">
-              <a:buNone/>
-            </a:pPr>
-            <a:r>
-              <a:rPr lang="en-US" sz="1000" b="1" dirty="0">
-                <a:solidFill>
-                  <a:srgbClr val="6B7280"/>
-                </a:solidFill>
-                <a:latin typeface="游ゴシック" pitchFamily="34" charset="0"/>
-                <a:ea typeface="游ゴシック" pitchFamily="34" charset="-122"/>
-                <a:cs typeface="游ゴシック" pitchFamily="34" charset="-120"/>
-              </a:rPr>
-              <a:t>未</a:t>
-            </a:r>
-            <a:endParaRPr lang="en-US" sz="1000" dirty="0"/>
-          </a:p>
-        </p:txBody>
-      </p:sp>
-      <p:sp>
-        <p:nvSpPr>
-          <p:cNvPr id="45" name="Shape 43"/>
-          <p:cNvSpPr/>
-          <p:nvPr/>
-        </p:nvSpPr>
-        <p:spPr>
-          <a:xfrm>
-            <a:off x="548640" y="3337560"/>
-            <a:ext cx="11091672" cy="365760"/>
-          </a:xfrm>
-          <a:prstGeom prst="rect">
-            <a:avLst/>
-          </a:prstGeom>
-          <a:solidFill>
-            <a:srgbClr val="F5F7FA"/>
-          </a:solidFill>
-          <a:ln/>
-        </p:spPr>
-      </p:sp>
-      <p:sp>
-        <p:nvSpPr>
-          <p:cNvPr id="46" name="Text 44"/>
-          <p:cNvSpPr/>
-          <p:nvPr/>
-        </p:nvSpPr>
-        <p:spPr>
-          <a:xfrm>
-            <a:off x="548640" y="3337560"/>
-            <a:ext cx="1097280" cy="365760"/>
-          </a:xfrm>
-          <a:prstGeom prst="rect">
-            <a:avLst/>
-          </a:prstGeom>
-          <a:noFill/>
-          <a:ln/>
-        </p:spPr>
-        <p:txBody>
-          <a:bodyPr wrap="square" rtlCol="0" anchor="ctr"/>
-          <a:lstStyle/>
-          <a:p>
-            <a:pPr algn="l" indent="0" marL="0">
-              <a:buNone/>
-            </a:pPr>
-            <a:r>
-              <a:rPr lang="en-US" sz="1300" b="1" dirty="0">
-                <a:solidFill>
-                  <a:srgbClr val="1A1A2E"/>
-                </a:solidFill>
-                <a:latin typeface="游ゴシック" pitchFamily="34" charset="0"/>
-                <a:ea typeface="游ゴシック" pitchFamily="34" charset="-122"/>
-                <a:cs typeface="游ゴシック" pitchFamily="34" charset="-120"/>
-              </a:rPr>
-              <a:t>千種区</a:t>
-            </a:r>
-            <a:endParaRPr lang="en-US" sz="1300" dirty="0"/>
-          </a:p>
-        </p:txBody>
-      </p:sp>
-      <p:sp>
-        <p:nvSpPr>
-          <p:cNvPr id="47" name="Text 45"/>
-          <p:cNvSpPr/>
-          <p:nvPr/>
-        </p:nvSpPr>
-        <p:spPr>
-          <a:xfrm>
-            <a:off x="1645920" y="3337560"/>
-            <a:ext cx="1005840" cy="365760"/>
-          </a:xfrm>
-          <a:prstGeom prst="rect">
-            <a:avLst/>
-          </a:prstGeom>
-          <a:noFill/>
-          <a:ln/>
-        </p:spPr>
-        <p:txBody>
-          <a:bodyPr wrap="square" rtlCol="0" anchor="ctr"/>
-          <a:lstStyle/>
-          <a:p>
-            <a:pPr algn="ctr" indent="0" marL="0">
-              <a:buNone/>
-            </a:pPr>
-            <a:r>
-              <a:rPr lang="en-US" sz="1200" b="1" dirty="0">
-                <a:solidFill>
-                  <a:srgbClr val="1A1A2E"/>
-                </a:solidFill>
-                <a:latin typeface="游ゴシック" pitchFamily="34" charset="0"/>
-                <a:ea typeface="游ゴシック" pitchFamily="34" charset="-122"/>
-                <a:cs typeface="游ゴシック" pitchFamily="34" charset="-120"/>
-              </a:rPr>
-              <a:t>12/5</a:t>
-            </a:r>
-            <a:endParaRPr lang="en-US" sz="1200" dirty="0"/>
-          </a:p>
-        </p:txBody>
-      </p:sp>
-      <p:sp>
-        <p:nvSpPr>
-          <p:cNvPr id="48" name="Text 46"/>
-          <p:cNvSpPr/>
-          <p:nvPr/>
-        </p:nvSpPr>
-        <p:spPr>
-          <a:xfrm>
-            <a:off x="2651760" y="3337560"/>
-            <a:ext cx="1280160" cy="365760"/>
-          </a:xfrm>
-          <a:prstGeom prst="rect">
-            <a:avLst/>
-          </a:prstGeom>
-          <a:noFill/>
-          <a:ln/>
-        </p:spPr>
-        <p:txBody>
-          <a:bodyPr wrap="square" rtlCol="0" anchor="ctr"/>
-          <a:lstStyle/>
-          <a:p>
-            <a:pPr algn="ctr" indent="0" marL="0">
-              <a:buNone/>
-            </a:pPr>
-            <a:r>
-              <a:rPr lang="en-US" sz="1200" b="1" dirty="0">
-                <a:solidFill>
-                  <a:srgbClr val="1A1A2E"/>
-                </a:solidFill>
-                <a:latin typeface="游ゴシック" pitchFamily="34" charset="0"/>
-                <a:ea typeface="游ゴシック" pitchFamily="34" charset="-122"/>
-                <a:cs typeface="游ゴシック" pitchFamily="34" charset="-120"/>
-              </a:rPr>
-              <a:t>7月</a:t>
-            </a:r>
-            <a:endParaRPr lang="en-US" sz="1200" dirty="0"/>
-          </a:p>
-        </p:txBody>
-      </p:sp>
-      <p:sp>
-        <p:nvSpPr>
-          <p:cNvPr id="49" name="Text 47"/>
-          <p:cNvSpPr/>
-          <p:nvPr/>
-        </p:nvSpPr>
-        <p:spPr>
-          <a:xfrm>
-            <a:off x="3931920" y="3337560"/>
-            <a:ext cx="4114800" cy="365760"/>
-          </a:xfrm>
-          <a:prstGeom prst="rect">
-            <a:avLst/>
-          </a:prstGeom>
-          <a:noFill/>
-          <a:ln/>
-        </p:spPr>
-        <p:txBody>
-          <a:bodyPr wrap="square" rtlCol="0" anchor="ctr"/>
-          <a:lstStyle/>
-          <a:p>
-            <a:pPr algn="r" indent="0" marL="0">
-              <a:buNone/>
-            </a:pPr>
-            <a:r>
-              <a:rPr lang="en-US" sz="1300" b="1" dirty="0">
-                <a:solidFill>
-                  <a:srgbClr val="1A1A2E"/>
-                </a:solidFill>
-                <a:latin typeface="游ゴシック" pitchFamily="34" charset="0"/>
-                <a:ea typeface="游ゴシック" pitchFamily="34" charset="-122"/>
-                <a:cs typeface="游ゴシック" pitchFamily="34" charset="-120"/>
-              </a:rPr>
-              <a:t>3,700,000</a:t>
-            </a:r>
-            <a:endParaRPr lang="en-US" sz="1300" dirty="0"/>
-          </a:p>
-        </p:txBody>
-      </p:sp>
-      <p:sp>
-        <p:nvSpPr>
-          <p:cNvPr id="50" name="Shape 48"/>
-          <p:cNvSpPr/>
-          <p:nvPr/>
-        </p:nvSpPr>
-        <p:spPr>
-          <a:xfrm>
-            <a:off x="8206740" y="3410712"/>
-            <a:ext cx="594360" cy="219456"/>
-          </a:xfrm>
-          <a:prstGeom prst="rect">
-            <a:avLst/>
-          </a:prstGeom>
-          <a:solidFill>
-            <a:srgbClr val="E5E7EB"/>
-          </a:solidFill>
-          <a:ln/>
-        </p:spPr>
-      </p:sp>
-      <p:sp>
-        <p:nvSpPr>
-          <p:cNvPr id="51" name="Text 49"/>
-          <p:cNvSpPr/>
-          <p:nvPr/>
-        </p:nvSpPr>
-        <p:spPr>
-          <a:xfrm>
-            <a:off x="8206740" y="3410712"/>
-            <a:ext cx="594360" cy="219456"/>
-          </a:xfrm>
-          <a:prstGeom prst="rect">
-            <a:avLst/>
-          </a:prstGeom>
-          <a:noFill/>
-          <a:ln/>
-        </p:spPr>
-        <p:txBody>
-          <a:bodyPr wrap="square" rtlCol="0" anchor="ctr"/>
-          <a:lstStyle/>
-          <a:p>
-            <a:pPr algn="ctr" indent="0" marL="0">
-              <a:buNone/>
-            </a:pPr>
-            <a:r>
-              <a:rPr lang="en-US" sz="1000" b="1" dirty="0">
-                <a:solidFill>
-                  <a:srgbClr val="6B7280"/>
-                </a:solidFill>
-                <a:latin typeface="游ゴシック" pitchFamily="34" charset="0"/>
-                <a:ea typeface="游ゴシック" pitchFamily="34" charset="-122"/>
-                <a:cs typeface="游ゴシック" pitchFamily="34" charset="-120"/>
-              </a:rPr>
-              <a:t>未</a:t>
-            </a:r>
-            <a:endParaRPr lang="en-US" sz="1000" dirty="0"/>
-          </a:p>
-        </p:txBody>
-      </p:sp>
-      <p:sp>
-        <p:nvSpPr>
-          <p:cNvPr id="52" name="Shape 50"/>
-          <p:cNvSpPr/>
-          <p:nvPr/>
-        </p:nvSpPr>
-        <p:spPr>
-          <a:xfrm>
-            <a:off x="548640" y="3703320"/>
-            <a:ext cx="11091672" cy="365760"/>
-          </a:xfrm>
-          <a:prstGeom prst="rect">
-            <a:avLst/>
-          </a:prstGeom>
-          <a:solidFill>
-            <a:srgbClr val="FFFFFF"/>
-          </a:solidFill>
-          <a:ln/>
-        </p:spPr>
-      </p:sp>
-      <p:sp>
-        <p:nvSpPr>
-          <p:cNvPr id="53" name="Text 51"/>
-          <p:cNvSpPr/>
-          <p:nvPr/>
-        </p:nvSpPr>
-        <p:spPr>
-          <a:xfrm>
-            <a:off x="548640" y="3703320"/>
-            <a:ext cx="1097280" cy="365760"/>
-          </a:xfrm>
-          <a:prstGeom prst="rect">
-            <a:avLst/>
-          </a:prstGeom>
-          <a:noFill/>
-          <a:ln/>
-        </p:spPr>
-        <p:txBody>
-          <a:bodyPr wrap="square" rtlCol="0" anchor="ctr"/>
-          <a:lstStyle/>
-          <a:p>
-            <a:pPr algn="l" indent="0" marL="0">
-              <a:buNone/>
-            </a:pPr>
-            <a:r>
-              <a:rPr lang="en-US" sz="1300" b="1" dirty="0">
-                <a:solidFill>
-                  <a:srgbClr val="1A1A2E"/>
-                </a:solidFill>
-                <a:latin typeface="游ゴシック" pitchFamily="34" charset="0"/>
-                <a:ea typeface="游ゴシック" pitchFamily="34" charset="-122"/>
-                <a:cs typeface="游ゴシック" pitchFamily="34" charset="-120"/>
-              </a:rPr>
-              <a:t>天白区</a:t>
-            </a:r>
-            <a:endParaRPr lang="en-US" sz="1300" dirty="0"/>
-          </a:p>
-        </p:txBody>
-      </p:sp>
-      <p:sp>
-        <p:nvSpPr>
-          <p:cNvPr id="54" name="Text 52"/>
-          <p:cNvSpPr/>
-          <p:nvPr/>
-        </p:nvSpPr>
-        <p:spPr>
-          <a:xfrm>
-            <a:off x="1645920" y="3703320"/>
-            <a:ext cx="1005840" cy="365760"/>
-          </a:xfrm>
-          <a:prstGeom prst="rect">
-            <a:avLst/>
-          </a:prstGeom>
-          <a:noFill/>
-          <a:ln/>
-        </p:spPr>
-        <p:txBody>
-          <a:bodyPr wrap="square" rtlCol="0" anchor="ctr"/>
-          <a:lstStyle/>
-          <a:p>
-            <a:pPr algn="ctr" indent="0" marL="0">
-              <a:buNone/>
-            </a:pPr>
-            <a:r>
-              <a:rPr lang="en-US" sz="1200" b="1" dirty="0">
-                <a:solidFill>
-                  <a:srgbClr val="1A1A2E"/>
-                </a:solidFill>
-                <a:latin typeface="游ゴシック" pitchFamily="34" charset="0"/>
-                <a:ea typeface="游ゴシック" pitchFamily="34" charset="-122"/>
-                <a:cs typeface="游ゴシック" pitchFamily="34" charset="-120"/>
-              </a:rPr>
-              <a:t>12/5</a:t>
-            </a:r>
-            <a:endParaRPr lang="en-US" sz="1200" dirty="0"/>
-          </a:p>
-        </p:txBody>
-      </p:sp>
-      <p:sp>
-        <p:nvSpPr>
-          <p:cNvPr id="55" name="Text 53"/>
-          <p:cNvSpPr/>
-          <p:nvPr/>
-        </p:nvSpPr>
-        <p:spPr>
-          <a:xfrm>
-            <a:off x="2651760" y="3703320"/>
-            <a:ext cx="1280160" cy="365760"/>
-          </a:xfrm>
-          <a:prstGeom prst="rect">
-            <a:avLst/>
-          </a:prstGeom>
-          <a:noFill/>
-          <a:ln/>
-        </p:spPr>
-        <p:txBody>
-          <a:bodyPr wrap="square" rtlCol="0" anchor="ctr"/>
-          <a:lstStyle/>
-          <a:p>
-            <a:pPr algn="ctr" indent="0" marL="0">
-              <a:buNone/>
-            </a:pPr>
-            <a:r>
-              <a:rPr lang="en-US" sz="1200" b="1" dirty="0">
-                <a:solidFill>
-                  <a:srgbClr val="1A1A2E"/>
-                </a:solidFill>
-                <a:latin typeface="游ゴシック" pitchFamily="34" charset="0"/>
-                <a:ea typeface="游ゴシック" pitchFamily="34" charset="-122"/>
-                <a:cs typeface="游ゴシック" pitchFamily="34" charset="-120"/>
-              </a:rPr>
-              <a:t>7月</a:t>
-            </a:r>
-            <a:endParaRPr lang="en-US" sz="1200" dirty="0"/>
-          </a:p>
-        </p:txBody>
-      </p:sp>
-      <p:sp>
-        <p:nvSpPr>
-          <p:cNvPr id="56" name="Text 54"/>
-          <p:cNvSpPr/>
-          <p:nvPr/>
-        </p:nvSpPr>
-        <p:spPr>
-          <a:xfrm>
-            <a:off x="3931920" y="3703320"/>
-            <a:ext cx="4114800" cy="365760"/>
-          </a:xfrm>
-          <a:prstGeom prst="rect">
-            <a:avLst/>
-          </a:prstGeom>
-          <a:noFill/>
-          <a:ln/>
-        </p:spPr>
-        <p:txBody>
-          <a:bodyPr wrap="square" rtlCol="0" anchor="ctr"/>
-          <a:lstStyle/>
-          <a:p>
-            <a:pPr algn="r" indent="0" marL="0">
-              <a:buNone/>
-            </a:pPr>
-            <a:r>
-              <a:rPr lang="en-US" sz="1300" b="1" dirty="0">
-                <a:solidFill>
-                  <a:srgbClr val="1A1A2E"/>
-                </a:solidFill>
-                <a:latin typeface="游ゴシック" pitchFamily="34" charset="0"/>
-                <a:ea typeface="游ゴシック" pitchFamily="34" charset="-122"/>
-                <a:cs typeface="游ゴシック" pitchFamily="34" charset="-120"/>
-              </a:rPr>
-              <a:t>5,200,000</a:t>
-            </a:r>
-            <a:endParaRPr lang="en-US" sz="1300" dirty="0"/>
-          </a:p>
-        </p:txBody>
-      </p:sp>
-      <p:sp>
-        <p:nvSpPr>
-          <p:cNvPr id="57" name="Shape 55"/>
-          <p:cNvSpPr/>
-          <p:nvPr/>
-        </p:nvSpPr>
-        <p:spPr>
-          <a:xfrm>
-            <a:off x="8206740" y="3776472"/>
-            <a:ext cx="594360" cy="219456"/>
-          </a:xfrm>
-          <a:prstGeom prst="rect">
-            <a:avLst/>
-          </a:prstGeom>
-          <a:solidFill>
-            <a:srgbClr val="E5E7EB"/>
-          </a:solidFill>
-          <a:ln/>
-        </p:spPr>
-      </p:sp>
-      <p:sp>
-        <p:nvSpPr>
-          <p:cNvPr id="58" name="Text 56"/>
-          <p:cNvSpPr/>
-          <p:nvPr/>
-        </p:nvSpPr>
-        <p:spPr>
-          <a:xfrm>
-            <a:off x="8206740" y="3776472"/>
-            <a:ext cx="594360" cy="219456"/>
-          </a:xfrm>
-          <a:prstGeom prst="rect">
-            <a:avLst/>
-          </a:prstGeom>
-          <a:noFill/>
-          <a:ln/>
-        </p:spPr>
-        <p:txBody>
-          <a:bodyPr wrap="square" rtlCol="0" anchor="ctr"/>
-          <a:lstStyle/>
-          <a:p>
-            <a:pPr algn="ctr" indent="0" marL="0">
-              <a:buNone/>
-            </a:pPr>
-            <a:r>
-              <a:rPr lang="en-US" sz="1000" b="1" dirty="0">
-                <a:solidFill>
-                  <a:srgbClr val="6B7280"/>
-                </a:solidFill>
-                <a:latin typeface="游ゴシック" pitchFamily="34" charset="0"/>
-                <a:ea typeface="游ゴシック" pitchFamily="34" charset="-122"/>
-                <a:cs typeface="游ゴシック" pitchFamily="34" charset="-120"/>
-              </a:rPr>
-              <a:t>未</a:t>
-            </a:r>
-            <a:endParaRPr lang="en-US" sz="1000" dirty="0"/>
-          </a:p>
-        </p:txBody>
-      </p:sp>
-      <p:sp>
-        <p:nvSpPr>
-          <p:cNvPr id="59" name="Shape 57"/>
-          <p:cNvSpPr/>
-          <p:nvPr/>
-        </p:nvSpPr>
-        <p:spPr>
-          <a:xfrm>
-            <a:off x="548640" y="4069080"/>
-            <a:ext cx="11091672" cy="365760"/>
-          </a:xfrm>
-          <a:prstGeom prst="rect">
-            <a:avLst/>
-          </a:prstGeom>
-          <a:solidFill>
-            <a:srgbClr val="F5F7FA"/>
-          </a:solidFill>
-          <a:ln/>
-        </p:spPr>
-      </p:sp>
-      <p:sp>
-        <p:nvSpPr>
-          <p:cNvPr id="60" name="Text 58"/>
-          <p:cNvSpPr/>
-          <p:nvPr/>
-        </p:nvSpPr>
-        <p:spPr>
-          <a:xfrm>
-            <a:off x="548640" y="4069080"/>
-            <a:ext cx="1097280" cy="365760"/>
-          </a:xfrm>
-          <a:prstGeom prst="rect">
-            <a:avLst/>
-          </a:prstGeom>
-          <a:noFill/>
-          <a:ln/>
-        </p:spPr>
-        <p:txBody>
-          <a:bodyPr wrap="square" rtlCol="0" anchor="ctr"/>
-          <a:lstStyle/>
-          <a:p>
-            <a:pPr algn="l" indent="0" marL="0">
-              <a:buNone/>
-            </a:pPr>
-            <a:r>
-              <a:rPr lang="en-US" sz="1300" b="1" dirty="0">
-                <a:solidFill>
-                  <a:srgbClr val="1A1A2E"/>
-                </a:solidFill>
-                <a:latin typeface="游ゴシック" pitchFamily="34" charset="0"/>
-                <a:ea typeface="游ゴシック" pitchFamily="34" charset="-122"/>
-                <a:cs typeface="游ゴシック" pitchFamily="34" charset="-120"/>
-              </a:rPr>
-              <a:t>守山区</a:t>
-            </a:r>
-            <a:endParaRPr lang="en-US" sz="1300" dirty="0"/>
-          </a:p>
-        </p:txBody>
-      </p:sp>
-      <p:sp>
-        <p:nvSpPr>
-          <p:cNvPr id="61" name="Text 59"/>
-          <p:cNvSpPr/>
-          <p:nvPr/>
-        </p:nvSpPr>
-        <p:spPr>
-          <a:xfrm>
-            <a:off x="1645920" y="4069080"/>
-            <a:ext cx="1005840" cy="365760"/>
-          </a:xfrm>
-          <a:prstGeom prst="rect">
-            <a:avLst/>
-          </a:prstGeom>
-          <a:noFill/>
-          <a:ln/>
-        </p:spPr>
-        <p:txBody>
-          <a:bodyPr wrap="square" rtlCol="0" anchor="ctr"/>
-          <a:lstStyle/>
-          <a:p>
-            <a:pPr algn="ctr" indent="0" marL="0">
-              <a:buNone/>
-            </a:pPr>
-            <a:r>
-              <a:rPr lang="en-US" sz="1200" b="1" dirty="0">
-                <a:solidFill>
-                  <a:srgbClr val="1A1A2E"/>
-                </a:solidFill>
-                <a:latin typeface="游ゴシック" pitchFamily="34" charset="0"/>
-                <a:ea typeface="游ゴシック" pitchFamily="34" charset="-122"/>
-                <a:cs typeface="游ゴシック" pitchFamily="34" charset="-120"/>
-              </a:rPr>
-              <a:t>12/6</a:t>
-            </a:r>
-            <a:endParaRPr lang="en-US" sz="1200" dirty="0"/>
-          </a:p>
-        </p:txBody>
-      </p:sp>
-      <p:sp>
-        <p:nvSpPr>
-          <p:cNvPr id="62" name="Text 60"/>
-          <p:cNvSpPr/>
-          <p:nvPr/>
-        </p:nvSpPr>
-        <p:spPr>
-          <a:xfrm>
-            <a:off x="2651760" y="4069080"/>
-            <a:ext cx="1280160" cy="365760"/>
-          </a:xfrm>
-          <a:prstGeom prst="rect">
-            <a:avLst/>
-          </a:prstGeom>
-          <a:noFill/>
-          <a:ln/>
-        </p:spPr>
-        <p:txBody>
-          <a:bodyPr wrap="square" rtlCol="0" anchor="ctr"/>
-          <a:lstStyle/>
-          <a:p>
-            <a:pPr algn="ctr" indent="0" marL="0">
-              <a:buNone/>
-            </a:pPr>
-            <a:r>
-              <a:rPr lang="en-US" sz="1200" b="1" dirty="0">
-                <a:solidFill>
-                  <a:srgbClr val="1A1A2E"/>
-                </a:solidFill>
-                <a:latin typeface="游ゴシック" pitchFamily="34" charset="0"/>
-                <a:ea typeface="游ゴシック" pitchFamily="34" charset="-122"/>
-                <a:cs typeface="游ゴシック" pitchFamily="34" charset="-120"/>
-              </a:rPr>
-              <a:t>7月</a:t>
-            </a:r>
-            <a:endParaRPr lang="en-US" sz="1200" dirty="0"/>
-          </a:p>
-        </p:txBody>
-      </p:sp>
-      <p:sp>
-        <p:nvSpPr>
-          <p:cNvPr id="63" name="Text 61"/>
-          <p:cNvSpPr/>
-          <p:nvPr/>
-        </p:nvSpPr>
-        <p:spPr>
-          <a:xfrm>
-            <a:off x="3931920" y="4069080"/>
-            <a:ext cx="4114800" cy="365760"/>
-          </a:xfrm>
-          <a:prstGeom prst="rect">
-            <a:avLst/>
-          </a:prstGeom>
-          <a:noFill/>
-          <a:ln/>
-        </p:spPr>
-        <p:txBody>
-          <a:bodyPr wrap="square" rtlCol="0" anchor="ctr"/>
-          <a:lstStyle/>
-          <a:p>
-            <a:pPr algn="r" indent="0" marL="0">
-              <a:buNone/>
-            </a:pPr>
-            <a:r>
-              <a:rPr lang="en-US" sz="1300" b="1" dirty="0">
-                <a:solidFill>
-                  <a:srgbClr val="1A1A2E"/>
-                </a:solidFill>
-                <a:latin typeface="游ゴシック" pitchFamily="34" charset="0"/>
-                <a:ea typeface="游ゴシック" pitchFamily="34" charset="-122"/>
-                <a:cs typeface="游ゴシック" pitchFamily="34" charset="-120"/>
-              </a:rPr>
-              <a:t>4,000,000</a:t>
-            </a:r>
-            <a:endParaRPr lang="en-US" sz="1300" dirty="0"/>
-          </a:p>
-        </p:txBody>
-      </p:sp>
-      <p:sp>
-        <p:nvSpPr>
-          <p:cNvPr id="64" name="Shape 62"/>
-          <p:cNvSpPr/>
-          <p:nvPr/>
-        </p:nvSpPr>
-        <p:spPr>
-          <a:xfrm>
-            <a:off x="8206740" y="4142232"/>
-            <a:ext cx="594360" cy="219456"/>
-          </a:xfrm>
-          <a:prstGeom prst="rect">
-            <a:avLst/>
-          </a:prstGeom>
-          <a:solidFill>
-            <a:srgbClr val="E5E7EB"/>
-          </a:solidFill>
-          <a:ln/>
-        </p:spPr>
-      </p:sp>
-      <p:sp>
-        <p:nvSpPr>
-          <p:cNvPr id="65" name="Text 63"/>
-          <p:cNvSpPr/>
-          <p:nvPr/>
-        </p:nvSpPr>
-        <p:spPr>
-          <a:xfrm>
-            <a:off x="8206740" y="4142232"/>
-            <a:ext cx="594360" cy="219456"/>
-          </a:xfrm>
-          <a:prstGeom prst="rect">
-            <a:avLst/>
-          </a:prstGeom>
-          <a:noFill/>
-          <a:ln/>
-        </p:spPr>
-        <p:txBody>
-          <a:bodyPr wrap="square" rtlCol="0" anchor="ctr"/>
-          <a:lstStyle/>
-          <a:p>
-            <a:pPr algn="ctr" indent="0" marL="0">
-              <a:buNone/>
-            </a:pPr>
-            <a:r>
-              <a:rPr lang="en-US" sz="1000" b="1" dirty="0">
-                <a:solidFill>
-                  <a:srgbClr val="6B7280"/>
-                </a:solidFill>
-                <a:latin typeface="游ゴシック" pitchFamily="34" charset="0"/>
-                <a:ea typeface="游ゴシック" pitchFamily="34" charset="-122"/>
-                <a:cs typeface="游ゴシック" pitchFamily="34" charset="-120"/>
-              </a:rPr>
-              <a:t>未</a:t>
-            </a:r>
-            <a:endParaRPr lang="en-US" sz="1000" dirty="0"/>
-          </a:p>
-        </p:txBody>
-      </p:sp>
-      <p:sp>
-        <p:nvSpPr>
-          <p:cNvPr id="66" name="Shape 64"/>
-          <p:cNvSpPr/>
-          <p:nvPr/>
-        </p:nvSpPr>
-        <p:spPr>
-          <a:xfrm>
-            <a:off x="548640" y="4434840"/>
-            <a:ext cx="11091672" cy="365760"/>
-          </a:xfrm>
-          <a:prstGeom prst="rect">
-            <a:avLst/>
-          </a:prstGeom>
-          <a:solidFill>
-            <a:srgbClr val="FFFFFF"/>
-          </a:solidFill>
-          <a:ln/>
-        </p:spPr>
-      </p:sp>
-      <p:sp>
-        <p:nvSpPr>
-          <p:cNvPr id="67" name="Text 65"/>
-          <p:cNvSpPr/>
-          <p:nvPr/>
-        </p:nvSpPr>
-        <p:spPr>
-          <a:xfrm>
-            <a:off x="548640" y="4434840"/>
-            <a:ext cx="1097280" cy="365760"/>
-          </a:xfrm>
-          <a:prstGeom prst="rect">
-            <a:avLst/>
-          </a:prstGeom>
-          <a:noFill/>
-          <a:ln/>
-        </p:spPr>
-        <p:txBody>
-          <a:bodyPr wrap="square" rtlCol="0" anchor="ctr"/>
-          <a:lstStyle/>
-          <a:p>
-            <a:pPr algn="l" indent="0" marL="0">
-              <a:buNone/>
-            </a:pPr>
-            <a:r>
-              <a:rPr lang="en-US" sz="1300" b="1" dirty="0">
-                <a:solidFill>
-                  <a:srgbClr val="1A1A2E"/>
-                </a:solidFill>
-                <a:latin typeface="游ゴシック" pitchFamily="34" charset="0"/>
-                <a:ea typeface="游ゴシック" pitchFamily="34" charset="-122"/>
-                <a:cs typeface="游ゴシック" pitchFamily="34" charset="-120"/>
-              </a:rPr>
-              <a:t>南区</a:t>
-            </a:r>
-            <a:endParaRPr lang="en-US" sz="1300" dirty="0"/>
-          </a:p>
-        </p:txBody>
-      </p:sp>
-      <p:sp>
-        <p:nvSpPr>
-          <p:cNvPr id="68" name="Text 66"/>
-          <p:cNvSpPr/>
-          <p:nvPr/>
-        </p:nvSpPr>
-        <p:spPr>
-          <a:xfrm>
-            <a:off x="1645920" y="4434840"/>
-            <a:ext cx="1005840" cy="365760"/>
-          </a:xfrm>
-          <a:prstGeom prst="rect">
-            <a:avLst/>
-          </a:prstGeom>
-          <a:noFill/>
-          <a:ln/>
-        </p:spPr>
-        <p:txBody>
-          <a:bodyPr wrap="square" rtlCol="0" anchor="ctr"/>
-          <a:lstStyle/>
-          <a:p>
-            <a:pPr algn="ctr" indent="0" marL="0">
-              <a:buNone/>
-            </a:pPr>
-            <a:r>
-              <a:rPr lang="en-US" sz="1200" b="1" dirty="0">
-                <a:solidFill>
-                  <a:srgbClr val="1A1A2E"/>
-                </a:solidFill>
-                <a:latin typeface="游ゴシック" pitchFamily="34" charset="0"/>
-                <a:ea typeface="游ゴシック" pitchFamily="34" charset="-122"/>
-                <a:cs typeface="游ゴシック" pitchFamily="34" charset="-120"/>
-              </a:rPr>
-              <a:t>2/21</a:t>
-            </a:r>
-            <a:endParaRPr lang="en-US" sz="1200" dirty="0"/>
-          </a:p>
-        </p:txBody>
-      </p:sp>
-      <p:sp>
-        <p:nvSpPr>
-          <p:cNvPr id="69" name="Text 67"/>
-          <p:cNvSpPr/>
-          <p:nvPr/>
-        </p:nvSpPr>
-        <p:spPr>
-          <a:xfrm>
-            <a:off x="2651760" y="4434840"/>
-            <a:ext cx="1280160" cy="365760"/>
-          </a:xfrm>
-          <a:prstGeom prst="rect">
-            <a:avLst/>
-          </a:prstGeom>
-          <a:noFill/>
-          <a:ln/>
-        </p:spPr>
-        <p:txBody>
-          <a:bodyPr wrap="square" rtlCol="0" anchor="ctr"/>
-          <a:lstStyle/>
-          <a:p>
-            <a:pPr algn="ctr" indent="0" marL="0">
-              <a:buNone/>
-            </a:pPr>
-            <a:r>
-              <a:rPr lang="en-US" sz="1200" b="1" dirty="0">
-                <a:solidFill>
-                  <a:srgbClr val="1A1A2E"/>
-                </a:solidFill>
-                <a:latin typeface="游ゴシック" pitchFamily="34" charset="0"/>
-                <a:ea typeface="游ゴシック" pitchFamily="34" charset="-122"/>
-                <a:cs typeface="游ゴシック" pitchFamily="34" charset="-120"/>
-              </a:rPr>
-              <a:t>10月</a:t>
-            </a:r>
-            <a:endParaRPr lang="en-US" sz="1200" dirty="0"/>
-          </a:p>
-        </p:txBody>
-      </p:sp>
-      <p:sp>
-        <p:nvSpPr>
-          <p:cNvPr id="70" name="Text 68"/>
-          <p:cNvSpPr/>
-          <p:nvPr/>
-        </p:nvSpPr>
-        <p:spPr>
-          <a:xfrm>
-            <a:off x="3931920" y="4434840"/>
-            <a:ext cx="4114800" cy="365760"/>
-          </a:xfrm>
-          <a:prstGeom prst="rect">
-            <a:avLst/>
-          </a:prstGeom>
-          <a:noFill/>
-          <a:ln/>
-        </p:spPr>
-        <p:txBody>
-          <a:bodyPr wrap="square" rtlCol="0" anchor="ctr"/>
-          <a:lstStyle/>
-          <a:p>
-            <a:pPr algn="r" indent="0" marL="0">
-              <a:buNone/>
-            </a:pPr>
-            <a:r>
-              <a:rPr lang="en-US" sz="1300" b="1" dirty="0">
-                <a:solidFill>
-                  <a:srgbClr val="1A1A2E"/>
-                </a:solidFill>
-                <a:latin typeface="游ゴシック" pitchFamily="34" charset="0"/>
-                <a:ea typeface="游ゴシック" pitchFamily="34" charset="-122"/>
-                <a:cs typeface="游ゴシック" pitchFamily="34" charset="-120"/>
-              </a:rPr>
-              <a:t>2,200,000</a:t>
-            </a:r>
-            <a:endParaRPr lang="en-US" sz="1300" dirty="0"/>
-          </a:p>
-        </p:txBody>
-      </p:sp>
-      <p:sp>
-        <p:nvSpPr>
-          <p:cNvPr id="71" name="Shape 69"/>
-          <p:cNvSpPr/>
-          <p:nvPr/>
-        </p:nvSpPr>
-        <p:spPr>
-          <a:xfrm>
-            <a:off x="8206740" y="4507992"/>
-            <a:ext cx="594360" cy="219456"/>
-          </a:xfrm>
-          <a:prstGeom prst="rect">
-            <a:avLst/>
-          </a:prstGeom>
-          <a:solidFill>
-            <a:srgbClr val="E5E7EB"/>
-          </a:solidFill>
-          <a:ln/>
-        </p:spPr>
-      </p:sp>
-      <p:sp>
-        <p:nvSpPr>
-          <p:cNvPr id="72" name="Text 70"/>
-          <p:cNvSpPr/>
-          <p:nvPr/>
-        </p:nvSpPr>
-        <p:spPr>
-          <a:xfrm>
-            <a:off x="8206740" y="4507992"/>
-            <a:ext cx="594360" cy="219456"/>
-          </a:xfrm>
-          <a:prstGeom prst="rect">
-            <a:avLst/>
-          </a:prstGeom>
-          <a:noFill/>
-          <a:ln/>
-        </p:spPr>
-        <p:txBody>
-          <a:bodyPr wrap="square" rtlCol="0" anchor="ctr"/>
-          <a:lstStyle/>
-          <a:p>
-            <a:pPr algn="ctr" indent="0" marL="0">
-              <a:buNone/>
-            </a:pPr>
-            <a:r>
-              <a:rPr lang="en-US" sz="1000" b="1" dirty="0">
-                <a:solidFill>
-                  <a:srgbClr val="6B7280"/>
-                </a:solidFill>
-                <a:latin typeface="游ゴシック" pitchFamily="34" charset="0"/>
-                <a:ea typeface="游ゴシック" pitchFamily="34" charset="-122"/>
-                <a:cs typeface="游ゴシック" pitchFamily="34" charset="-120"/>
-              </a:rPr>
-              <a:t>未</a:t>
-            </a:r>
-            <a:endParaRPr lang="en-US" sz="1000" dirty="0"/>
-          </a:p>
-        </p:txBody>
-      </p:sp>
-      <p:sp>
-        <p:nvSpPr>
-          <p:cNvPr id="73" name="Shape 71"/>
-          <p:cNvSpPr/>
-          <p:nvPr/>
-        </p:nvSpPr>
-        <p:spPr>
-          <a:xfrm>
-            <a:off x="548640" y="4800600"/>
-            <a:ext cx="11091672" cy="365760"/>
-          </a:xfrm>
-          <a:prstGeom prst="rect">
-            <a:avLst/>
-          </a:prstGeom>
-          <a:solidFill>
-            <a:srgbClr val="F5F7FA"/>
-          </a:solidFill>
-          <a:ln/>
-        </p:spPr>
-      </p:sp>
-      <p:sp>
-        <p:nvSpPr>
-          <p:cNvPr id="74" name="Text 72"/>
-          <p:cNvSpPr/>
-          <p:nvPr/>
-        </p:nvSpPr>
-        <p:spPr>
-          <a:xfrm>
-            <a:off x="548640" y="4800600"/>
-            <a:ext cx="1097280" cy="365760"/>
-          </a:xfrm>
-          <a:prstGeom prst="rect">
-            <a:avLst/>
-          </a:prstGeom>
-          <a:noFill/>
-          <a:ln/>
-        </p:spPr>
-        <p:txBody>
-          <a:bodyPr wrap="square" rtlCol="0" anchor="ctr"/>
-          <a:lstStyle/>
-          <a:p>
-            <a:pPr algn="l" indent="0" marL="0">
-              <a:buNone/>
-            </a:pPr>
-            <a:r>
-              <a:rPr lang="en-US" sz="1300" b="1" dirty="0">
-                <a:solidFill>
-                  <a:srgbClr val="1A1A2E"/>
-                </a:solidFill>
-                <a:latin typeface="游ゴシック" pitchFamily="34" charset="0"/>
-                <a:ea typeface="游ゴシック" pitchFamily="34" charset="-122"/>
-                <a:cs typeface="游ゴシック" pitchFamily="34" charset="-120"/>
-              </a:rPr>
-              <a:t>中川区</a:t>
-            </a:r>
-            <a:endParaRPr lang="en-US" sz="1300" dirty="0"/>
-          </a:p>
-        </p:txBody>
-      </p:sp>
-      <p:sp>
-        <p:nvSpPr>
-          <p:cNvPr id="75" name="Text 73"/>
-          <p:cNvSpPr/>
-          <p:nvPr/>
-        </p:nvSpPr>
-        <p:spPr>
-          <a:xfrm>
-            <a:off x="1645920" y="4800600"/>
-            <a:ext cx="1005840" cy="365760"/>
-          </a:xfrm>
-          <a:prstGeom prst="rect">
-            <a:avLst/>
-          </a:prstGeom>
-          <a:noFill/>
-          <a:ln/>
-        </p:spPr>
-        <p:txBody>
-          <a:bodyPr wrap="square" rtlCol="0" anchor="ctr"/>
-          <a:lstStyle/>
-          <a:p>
-            <a:pPr algn="ctr" indent="0" marL="0">
-              <a:buNone/>
-            </a:pPr>
-            <a:r>
-              <a:rPr lang="en-US" sz="1200" b="1" dirty="0">
-                <a:solidFill>
-                  <a:srgbClr val="1A1A2E"/>
-                </a:solidFill>
-                <a:latin typeface="游ゴシック" pitchFamily="34" charset="0"/>
-                <a:ea typeface="游ゴシック" pitchFamily="34" charset="-122"/>
-                <a:cs typeface="游ゴシック" pitchFamily="34" charset="-120"/>
-              </a:rPr>
-              <a:t>2/28</a:t>
-            </a:r>
-            <a:endParaRPr lang="en-US" sz="1200" dirty="0"/>
-          </a:p>
-        </p:txBody>
-      </p:sp>
-      <p:sp>
-        <p:nvSpPr>
-          <p:cNvPr id="76" name="Text 74"/>
-          <p:cNvSpPr/>
-          <p:nvPr/>
-        </p:nvSpPr>
-        <p:spPr>
-          <a:xfrm>
-            <a:off x="2651760" y="4800600"/>
-            <a:ext cx="1280160" cy="365760"/>
-          </a:xfrm>
-          <a:prstGeom prst="rect">
-            <a:avLst/>
-          </a:prstGeom>
-          <a:noFill/>
-          <a:ln/>
-        </p:spPr>
-        <p:txBody>
-          <a:bodyPr wrap="square" rtlCol="0" anchor="ctr"/>
-          <a:lstStyle/>
-          <a:p>
-            <a:pPr algn="ctr" indent="0" marL="0">
-              <a:buNone/>
-            </a:pPr>
-            <a:r>
-              <a:rPr lang="en-US" sz="1200" b="1" dirty="0">
-                <a:solidFill>
-                  <a:srgbClr val="1A1A2E"/>
-                </a:solidFill>
-                <a:latin typeface="游ゴシック" pitchFamily="34" charset="0"/>
-                <a:ea typeface="游ゴシック" pitchFamily="34" charset="-122"/>
-                <a:cs typeface="游ゴシック" pitchFamily="34" charset="-120"/>
-              </a:rPr>
-              <a:t>8月頃</a:t>
-            </a:r>
-            <a:endParaRPr lang="en-US" sz="1200" dirty="0"/>
-          </a:p>
-        </p:txBody>
-      </p:sp>
-      <p:sp>
-        <p:nvSpPr>
-          <p:cNvPr id="77" name="Text 75"/>
-          <p:cNvSpPr/>
-          <p:nvPr/>
-        </p:nvSpPr>
-        <p:spPr>
-          <a:xfrm>
-            <a:off x="3931920" y="4800600"/>
-            <a:ext cx="4114800" cy="365760"/>
-          </a:xfrm>
-          <a:prstGeom prst="rect">
-            <a:avLst/>
-          </a:prstGeom>
-          <a:noFill/>
-          <a:ln/>
-        </p:spPr>
-        <p:txBody>
-          <a:bodyPr wrap="square" rtlCol="0" anchor="ctr"/>
-          <a:lstStyle/>
-          <a:p>
-            <a:pPr algn="r" indent="0" marL="0">
-              <a:buNone/>
-            </a:pPr>
-            <a:r>
-              <a:rPr lang="en-US" sz="1300" b="1" dirty="0">
-                <a:solidFill>
-                  <a:srgbClr val="6B7280"/>
-                </a:solidFill>
-                <a:latin typeface="游ゴシック" pitchFamily="34" charset="0"/>
-                <a:ea typeface="游ゴシック" pitchFamily="34" charset="-122"/>
-                <a:cs typeface="游ゴシック" pitchFamily="34" charset="-120"/>
-              </a:rPr>
-              <a:t>未定</a:t>
-            </a:r>
-            <a:endParaRPr lang="en-US" sz="1300" dirty="0"/>
-          </a:p>
-        </p:txBody>
-      </p:sp>
-      <p:sp>
-        <p:nvSpPr>
-          <p:cNvPr id="78" name="Shape 76"/>
-          <p:cNvSpPr/>
-          <p:nvPr/>
-        </p:nvSpPr>
-        <p:spPr>
-          <a:xfrm>
-            <a:off x="8206740" y="4873752"/>
-            <a:ext cx="594360" cy="219456"/>
-          </a:xfrm>
-          <a:prstGeom prst="rect">
-            <a:avLst/>
-          </a:prstGeom>
-          <a:solidFill>
-            <a:srgbClr val="E5E7EB"/>
-          </a:solidFill>
-          <a:ln/>
-        </p:spPr>
-      </p:sp>
-      <p:sp>
-        <p:nvSpPr>
-          <p:cNvPr id="79" name="Text 77"/>
-          <p:cNvSpPr/>
-          <p:nvPr/>
-        </p:nvSpPr>
-        <p:spPr>
-          <a:xfrm>
-            <a:off x="8206740" y="4873752"/>
-            <a:ext cx="594360" cy="219456"/>
-          </a:xfrm>
-          <a:prstGeom prst="rect">
-            <a:avLst/>
-          </a:prstGeom>
-          <a:noFill/>
-          <a:ln/>
-        </p:spPr>
-        <p:txBody>
-          <a:bodyPr wrap="square" rtlCol="0" anchor="ctr"/>
-          <a:lstStyle/>
-          <a:p>
-            <a:pPr algn="ctr" indent="0" marL="0">
-              <a:buNone/>
-            </a:pPr>
-            <a:r>
-              <a:rPr lang="en-US" sz="1000" b="1" dirty="0">
-                <a:solidFill>
-                  <a:srgbClr val="6B7280"/>
-                </a:solidFill>
-                <a:latin typeface="游ゴシック" pitchFamily="34" charset="0"/>
-                <a:ea typeface="游ゴシック" pitchFamily="34" charset="-122"/>
-                <a:cs typeface="游ゴシック" pitchFamily="34" charset="-120"/>
-              </a:rPr>
-              <a:t>未</a:t>
-            </a:r>
-            <a:endParaRPr lang="en-US" sz="1000" dirty="0"/>
-          </a:p>
-        </p:txBody>
-      </p:sp>
-    </p:spTree>
-  </p:cSld>
-  <p:clrMapOvr>
-    <a:masterClrMapping/>
-  </p:clrMapOvr>
-</p:sld>
-</file>
-
-<file path=ppt/slides/slide6.xml><?xml version="1.0" encoding="utf-8"?>
-<p:sld xmlns:a="http://schemas.openxmlformats.org/drawingml/2006/main" xmlns:r="http://schemas.openxmlformats.org/officeDocument/2006/relationships" xmlns:p="http://schemas.openxmlformats.org/presentationml/2006/main">
-  <p:cSld name="Slide 6">
-    <p:bg>
-      <p:bgPr>
-        <a:solidFill>
-          <a:srgbClr val="FFFFFF"/>
-        </a:solidFill>
-      </p:bgPr>
-    </p:bg>
-    <p:spTree>
-      <p:nvGrpSpPr>
-        <p:cNvPr id="1" name=""/>
-        <p:cNvGrpSpPr/>
-        <p:nvPr/>
-      </p:nvGrpSpPr>
-      <p:grpSpPr>
-        <a:xfrm>
-          <a:off x="0" y="0"/>
-          <a:ext cx="0" cy="0"/>
-          <a:chOff x="0" y="0"/>
-          <a:chExt cx="0" cy="0"/>
-        </a:xfrm>
-      </p:grpSpPr>
-      <p:sp>
-        <p:nvSpPr>
-          <p:cNvPr id="2" name="Text 0"/>
-          <p:cNvSpPr/>
-          <p:nvPr/>
-        </p:nvSpPr>
-        <p:spPr>
-          <a:xfrm>
-            <a:off x="548640" y="274320"/>
-            <a:ext cx="11091672" cy="594360"/>
-          </a:xfrm>
-          <a:prstGeom prst="rect">
-            <a:avLst/>
-          </a:prstGeom>
-          <a:noFill/>
-          <a:ln/>
-        </p:spPr>
-        <p:txBody>
-          <a:bodyPr wrap="square" rtlCol="0" anchor="t"/>
-          <a:lstStyle/>
-          <a:p>
-            <a:pPr algn="l" indent="0" marL="0">
-              <a:buNone/>
-            </a:pPr>
-            <a:r>
-              <a:rPr lang="en-US" sz="2600" b="1" dirty="0">
-                <a:solidFill>
-                  <a:srgbClr val="1A1A2E"/>
-                </a:solidFill>
-                <a:latin typeface="游ゴシック" pitchFamily="34" charset="0"/>
-                <a:ea typeface="游ゴシック" pitchFamily="34" charset="-122"/>
-                <a:cs typeface="游ゴシック" pitchFamily="34" charset="-120"/>
-              </a:rPr>
-              <a:t>原価引き当てのお願い</a:t>
-            </a:r>
-            <a:endParaRPr lang="en-US" sz="2600" dirty="0"/>
-          </a:p>
-        </p:txBody>
-      </p:sp>
-      <p:sp>
-        <p:nvSpPr>
-          <p:cNvPr id="3" name="Shape 1"/>
-          <p:cNvSpPr/>
-          <p:nvPr/>
-        </p:nvSpPr>
-        <p:spPr>
-          <a:xfrm>
-            <a:off x="548640" y="960120"/>
-            <a:ext cx="11091672" cy="36576"/>
-          </a:xfrm>
-          <a:prstGeom prst="rect">
-            <a:avLst/>
-          </a:prstGeom>
-          <a:solidFill>
-            <a:srgbClr val="2563EB"/>
-          </a:solidFill>
-          <a:ln/>
-        </p:spPr>
-      </p:sp>
-      <p:sp>
-        <p:nvSpPr>
-          <p:cNvPr id="4" name="Shape 2"/>
-          <p:cNvSpPr/>
-          <p:nvPr/>
-        </p:nvSpPr>
-        <p:spPr>
-          <a:xfrm>
-            <a:off x="548640" y="1234440"/>
-            <a:ext cx="11091672" cy="594360"/>
-          </a:xfrm>
-          <a:prstGeom prst="rect">
-            <a:avLst/>
-          </a:prstGeom>
-          <a:solidFill>
-            <a:srgbClr val="DBEAFE"/>
-          </a:solidFill>
-          <a:ln/>
-        </p:spPr>
-      </p:sp>
-      <p:sp>
-        <p:nvSpPr>
-          <p:cNvPr id="5" name="Text 3"/>
-          <p:cNvSpPr/>
-          <p:nvPr/>
-        </p:nvSpPr>
-        <p:spPr>
-          <a:xfrm>
-            <a:off x="731520" y="1234440"/>
-            <a:ext cx="10725912" cy="594360"/>
-          </a:xfrm>
-          <a:prstGeom prst="rect">
-            <a:avLst/>
-          </a:prstGeom>
-          <a:noFill/>
-          <a:ln/>
-        </p:spPr>
-        <p:txBody>
-          <a:bodyPr wrap="square" rtlCol="0" anchor="ctr"/>
-          <a:lstStyle/>
-          <a:p>
-            <a:pPr algn="l" indent="0" marL="0">
-              <a:buNone/>
-            </a:pPr>
-            <a:r>
-              <a:rPr lang="en-US" sz="1500" b="1" dirty="0">
-                <a:solidFill>
-                  <a:srgbClr val="1A1A2E"/>
-                </a:solidFill>
-                <a:latin typeface="游ゴシック" pitchFamily="34" charset="0"/>
-                <a:ea typeface="游ゴシック" pitchFamily="34" charset="-122"/>
-                <a:cs typeface="游ゴシック" pitchFamily="34" charset="-120"/>
-              </a:rPr>
-              <a:t>案件ごとの原価引き当てに、以下の項目も必ず入力してください。</a:t>
-            </a:r>
-            <a:endParaRPr lang="en-US" sz="1500" dirty="0"/>
-          </a:p>
-        </p:txBody>
-      </p:sp>
-      <p:sp>
-        <p:nvSpPr>
-          <p:cNvPr id="6" name="Shape 4"/>
-          <p:cNvSpPr/>
-          <p:nvPr/>
-        </p:nvSpPr>
-        <p:spPr>
-          <a:xfrm>
-            <a:off x="548640" y="2057400"/>
-            <a:ext cx="5408676" cy="1463040"/>
-          </a:xfrm>
-          <a:prstGeom prst="rect">
-            <a:avLst/>
-          </a:prstGeom>
-          <a:solidFill>
-            <a:srgbClr val="F5F7FA"/>
-          </a:solidFill>
-          <a:ln/>
-        </p:spPr>
-      </p:sp>
-      <p:sp>
-        <p:nvSpPr>
-          <p:cNvPr id="7" name="Shape 5"/>
-          <p:cNvSpPr/>
-          <p:nvPr/>
-        </p:nvSpPr>
-        <p:spPr>
-          <a:xfrm>
-            <a:off x="731520" y="2221992"/>
-            <a:ext cx="411480" cy="274320"/>
-          </a:xfrm>
-          <a:prstGeom prst="rect">
-            <a:avLst/>
-          </a:prstGeom>
-          <a:solidFill>
-            <a:srgbClr val="2563EB"/>
-          </a:solidFill>
-          <a:ln/>
-        </p:spPr>
-      </p:sp>
-      <p:sp>
-        <p:nvSpPr>
-          <p:cNvPr id="8" name="Text 6"/>
-          <p:cNvSpPr/>
-          <p:nvPr/>
-        </p:nvSpPr>
-        <p:spPr>
-          <a:xfrm>
-            <a:off x="731520" y="2221992"/>
-            <a:ext cx="411480" cy="274320"/>
-          </a:xfrm>
-          <a:prstGeom prst="rect">
-            <a:avLst/>
-          </a:prstGeom>
-          <a:noFill/>
-          <a:ln/>
-        </p:spPr>
-        <p:txBody>
-          <a:bodyPr wrap="square" rtlCol="0" anchor="ctr"/>
-          <a:lstStyle/>
-          <a:p>
-            <a:pPr algn="ctr" indent="0" marL="0">
-              <a:buNone/>
-            </a:pPr>
-            <a:r>
-              <a:rPr lang="en-US" sz="1100" b="1" dirty="0">
-                <a:solidFill>
-                  <a:srgbClr val="FFFFFF"/>
-                </a:solidFill>
-                <a:latin typeface="游ゴシック" pitchFamily="34" charset="0"/>
-                <a:ea typeface="游ゴシック" pitchFamily="34" charset="-122"/>
-                <a:cs typeface="游ゴシック" pitchFamily="34" charset="-120"/>
-              </a:rPr>
-              <a:t>①</a:t>
-            </a:r>
-            <a:endParaRPr lang="en-US" sz="1100" dirty="0"/>
-          </a:p>
-        </p:txBody>
-      </p:sp>
-      <p:sp>
-        <p:nvSpPr>
-          <p:cNvPr id="9" name="Text 7"/>
-          <p:cNvSpPr/>
-          <p:nvPr/>
-        </p:nvSpPr>
-        <p:spPr>
-          <a:xfrm>
-            <a:off x="1280160" y="2194560"/>
-            <a:ext cx="4494276" cy="329184"/>
-          </a:xfrm>
-          <a:prstGeom prst="rect">
-            <a:avLst/>
-          </a:prstGeom>
-          <a:noFill/>
-          <a:ln/>
-        </p:spPr>
-        <p:txBody>
-          <a:bodyPr wrap="square" rtlCol="0" anchor="ctr"/>
-          <a:lstStyle/>
-          <a:p>
-            <a:pPr algn="l" indent="0" marL="0">
-              <a:buNone/>
-            </a:pPr>
-            <a:r>
-              <a:rPr lang="en-US" sz="1800" b="1" dirty="0">
-                <a:solidFill>
-                  <a:srgbClr val="1A1A2E"/>
-                </a:solidFill>
-                <a:latin typeface="游ゴシック" pitchFamily="34" charset="0"/>
-                <a:ea typeface="游ゴシック" pitchFamily="34" charset="-122"/>
-                <a:cs typeface="游ゴシック" pitchFamily="34" charset="-120"/>
-              </a:rPr>
-              <a:t>搬入車両費</a:t>
-            </a:r>
-            <a:endParaRPr lang="en-US" sz="1800" dirty="0"/>
-          </a:p>
-        </p:txBody>
-      </p:sp>
-      <p:sp>
-        <p:nvSpPr>
-          <p:cNvPr id="10" name="Text 8"/>
-          <p:cNvSpPr/>
-          <p:nvPr/>
-        </p:nvSpPr>
-        <p:spPr>
-          <a:xfrm>
-            <a:off x="731520" y="2651760"/>
-            <a:ext cx="5042916" cy="731520"/>
-          </a:xfrm>
-          <a:prstGeom prst="rect">
-            <a:avLst/>
-          </a:prstGeom>
-          <a:noFill/>
-          <a:ln/>
-        </p:spPr>
-        <p:txBody>
-          <a:bodyPr wrap="square" rtlCol="0" anchor="t"/>
-          <a:lstStyle/>
-          <a:p>
-            <a:pPr algn="l" indent="0" marL="0">
-              <a:lnSpc>
-                <a:spcPct val="150000"/>
-              </a:lnSpc>
-              <a:buNone/>
-            </a:pPr>
-            <a:r>
-              <a:rPr lang="en-US" sz="1300" b="1" dirty="0">
-                <a:solidFill>
-                  <a:srgbClr val="6B7280"/>
-                </a:solidFill>
-                <a:latin typeface="游ゴシック" pitchFamily="34" charset="0"/>
-                <a:ea typeface="游ゴシック" pitchFamily="34" charset="-122"/>
-                <a:cs typeface="游ゴシック" pitchFamily="34" charset="-120"/>
-              </a:rPr>
-              <a:t>商品項目「③入件費・車輌費・諸経費」で</a:t>
-            </a:r>
-            <a:endParaRPr lang="en-US" sz="1300" dirty="0"/>
-          </a:p>
-          <a:p>
-            <a:pPr algn="l" indent="0" marL="0">
-              <a:lnSpc>
-                <a:spcPct val="150000"/>
-              </a:lnSpc>
-              <a:buNone/>
-            </a:pPr>
-            <a:r>
-              <a:rPr lang="en-US" sz="1300" b="1" dirty="0">
-                <a:solidFill>
-                  <a:srgbClr val="6B7280"/>
-                </a:solidFill>
-                <a:latin typeface="游ゴシック" pitchFamily="34" charset="0"/>
-                <a:ea typeface="游ゴシック" pitchFamily="34" charset="-122"/>
-                <a:cs typeface="游ゴシック" pitchFamily="34" charset="-120"/>
-              </a:rPr>
-              <a:t>搬入車両費を登録する</a:t>
-            </a:r>
-            <a:endParaRPr lang="en-US" sz="1300" dirty="0"/>
-          </a:p>
-        </p:txBody>
-      </p:sp>
-      <p:sp>
-        <p:nvSpPr>
-          <p:cNvPr id="11" name="Shape 9"/>
-          <p:cNvSpPr/>
-          <p:nvPr/>
-        </p:nvSpPr>
-        <p:spPr>
-          <a:xfrm>
-            <a:off x="6231636" y="2057400"/>
-            <a:ext cx="5408676" cy="1463040"/>
-          </a:xfrm>
-          <a:prstGeom prst="rect">
-            <a:avLst/>
-          </a:prstGeom>
-          <a:solidFill>
-            <a:srgbClr val="F5F7FA"/>
-          </a:solidFill>
-          <a:ln/>
-        </p:spPr>
-      </p:sp>
-      <p:sp>
-        <p:nvSpPr>
-          <p:cNvPr id="12" name="Shape 10"/>
-          <p:cNvSpPr/>
-          <p:nvPr/>
-        </p:nvSpPr>
-        <p:spPr>
-          <a:xfrm>
-            <a:off x="6414516" y="2221992"/>
-            <a:ext cx="411480" cy="274320"/>
-          </a:xfrm>
-          <a:prstGeom prst="rect">
-            <a:avLst/>
-          </a:prstGeom>
-          <a:solidFill>
-            <a:srgbClr val="2563EB"/>
-          </a:solidFill>
-          <a:ln/>
-        </p:spPr>
-      </p:sp>
-      <p:sp>
-        <p:nvSpPr>
-          <p:cNvPr id="13" name="Text 11"/>
-          <p:cNvSpPr/>
-          <p:nvPr/>
-        </p:nvSpPr>
-        <p:spPr>
-          <a:xfrm>
-            <a:off x="6414516" y="2221992"/>
-            <a:ext cx="411480" cy="274320"/>
-          </a:xfrm>
-          <a:prstGeom prst="rect">
-            <a:avLst/>
-          </a:prstGeom>
-          <a:noFill/>
-          <a:ln/>
-        </p:spPr>
-        <p:txBody>
-          <a:bodyPr wrap="square" rtlCol="0" anchor="ctr"/>
-          <a:lstStyle/>
-          <a:p>
-            <a:pPr algn="ctr" indent="0" marL="0">
-              <a:buNone/>
-            </a:pPr>
-            <a:r>
-              <a:rPr lang="en-US" sz="1100" b="1" dirty="0">
-                <a:solidFill>
-                  <a:srgbClr val="FFFFFF"/>
-                </a:solidFill>
-                <a:latin typeface="游ゴシック" pitchFamily="34" charset="0"/>
-                <a:ea typeface="游ゴシック" pitchFamily="34" charset="-122"/>
-                <a:cs typeface="游ゴシック" pitchFamily="34" charset="-120"/>
-              </a:rPr>
-              <a:t>②</a:t>
-            </a:r>
-            <a:endParaRPr lang="en-US" sz="1100" dirty="0"/>
-          </a:p>
-        </p:txBody>
-      </p:sp>
-      <p:sp>
-        <p:nvSpPr>
-          <p:cNvPr id="14" name="Text 12"/>
-          <p:cNvSpPr/>
-          <p:nvPr/>
-        </p:nvSpPr>
-        <p:spPr>
-          <a:xfrm>
-            <a:off x="6963156" y="2194560"/>
-            <a:ext cx="4494276" cy="329184"/>
-          </a:xfrm>
-          <a:prstGeom prst="rect">
-            <a:avLst/>
-          </a:prstGeom>
-          <a:noFill/>
-          <a:ln/>
-        </p:spPr>
-        <p:txBody>
-          <a:bodyPr wrap="square" rtlCol="0" anchor="ctr"/>
-          <a:lstStyle/>
-          <a:p>
-            <a:pPr algn="l" indent="0" marL="0">
-              <a:buNone/>
-            </a:pPr>
-            <a:r>
-              <a:rPr lang="en-US" sz="1800" b="1" dirty="0">
-                <a:solidFill>
-                  <a:srgbClr val="1A1A2E"/>
-                </a:solidFill>
-                <a:latin typeface="游ゴシック" pitchFamily="34" charset="0"/>
-                <a:ea typeface="游ゴシック" pitchFamily="34" charset="-122"/>
-                <a:cs typeface="游ゴシック" pitchFamily="34" charset="-120"/>
-              </a:rPr>
-              <a:t>人件費</a:t>
-            </a:r>
-            <a:endParaRPr lang="en-US" sz="1800" dirty="0"/>
-          </a:p>
-        </p:txBody>
-      </p:sp>
-      <p:sp>
-        <p:nvSpPr>
-          <p:cNvPr id="15" name="Text 13"/>
-          <p:cNvSpPr/>
-          <p:nvPr/>
-        </p:nvSpPr>
-        <p:spPr>
-          <a:xfrm>
-            <a:off x="6414516" y="2651760"/>
-            <a:ext cx="5042916" cy="731520"/>
-          </a:xfrm>
-          <a:prstGeom prst="rect">
-            <a:avLst/>
-          </a:prstGeom>
-          <a:noFill/>
-          <a:ln/>
-        </p:spPr>
-        <p:txBody>
-          <a:bodyPr wrap="square" rtlCol="0" anchor="t"/>
-          <a:lstStyle/>
-          <a:p>
-            <a:pPr algn="l" indent="0" marL="0">
-              <a:lnSpc>
-                <a:spcPct val="150000"/>
-              </a:lnSpc>
-              <a:buNone/>
-            </a:pPr>
-            <a:r>
-              <a:rPr lang="en-US" sz="1300" b="1" dirty="0">
-                <a:solidFill>
-                  <a:srgbClr val="6B7280"/>
-                </a:solidFill>
-                <a:latin typeface="游ゴシック" pitchFamily="34" charset="0"/>
-                <a:ea typeface="游ゴシック" pitchFamily="34" charset="-122"/>
-                <a:cs typeface="游ゴシック" pitchFamily="34" charset="-120"/>
-              </a:rPr>
-              <a:t>商品項目「③入件費・車輌費・諸経費」で</a:t>
-            </a:r>
-            <a:endParaRPr lang="en-US" sz="1300" dirty="0"/>
-          </a:p>
-          <a:p>
-            <a:pPr algn="l" indent="0" marL="0">
-              <a:lnSpc>
-                <a:spcPct val="150000"/>
-              </a:lnSpc>
-              <a:buNone/>
-            </a:pPr>
-            <a:r>
-              <a:rPr lang="en-US" sz="1300" b="1" dirty="0">
-                <a:solidFill>
-                  <a:srgbClr val="6B7280"/>
-                </a:solidFill>
-                <a:latin typeface="游ゴシック" pitchFamily="34" charset="0"/>
-                <a:ea typeface="游ゴシック" pitchFamily="34" charset="-122"/>
-                <a:cs typeface="游ゴシック" pitchFamily="34" charset="-120"/>
-              </a:rPr>
-              <a:t>人件費を登録する</a:t>
-            </a:r>
-            <a:endParaRPr lang="en-US" sz="1300" dirty="0"/>
-          </a:p>
-        </p:txBody>
-      </p:sp>
-      <p:sp>
-        <p:nvSpPr>
-          <p:cNvPr id="16" name="Shape 14"/>
-          <p:cNvSpPr/>
-          <p:nvPr/>
-        </p:nvSpPr>
-        <p:spPr>
-          <a:xfrm>
-            <a:off x="548640" y="3749040"/>
-            <a:ext cx="11091672" cy="548640"/>
-          </a:xfrm>
-          <a:prstGeom prst="rect">
-            <a:avLst/>
-          </a:prstGeom>
-          <a:solidFill>
-            <a:srgbClr val="FEF3C7"/>
-          </a:solidFill>
-          <a:ln/>
-        </p:spPr>
-      </p:sp>
-      <p:sp>
-        <p:nvSpPr>
-          <p:cNvPr id="17" name="Text 15"/>
-          <p:cNvSpPr/>
-          <p:nvPr/>
-        </p:nvSpPr>
-        <p:spPr>
-          <a:xfrm>
-            <a:off x="731520" y="3749040"/>
-            <a:ext cx="10725912" cy="548640"/>
-          </a:xfrm>
-          <a:prstGeom prst="rect">
-            <a:avLst/>
-          </a:prstGeom>
-          <a:noFill/>
-          <a:ln/>
-        </p:spPr>
-        <p:txBody>
-          <a:bodyPr wrap="square" rtlCol="0" anchor="ctr"/>
-          <a:lstStyle/>
-          <a:p>
-            <a:pPr algn="l" indent="0" marL="0">
-              <a:buNone/>
-            </a:pPr>
-            <a:r>
-              <a:rPr lang="en-US" sz="1300" b="1" dirty="0">
-                <a:solidFill>
-                  <a:srgbClr val="92400E"/>
-                </a:solidFill>
-                <a:latin typeface="游ゴシック" pitchFamily="34" charset="0"/>
-                <a:ea typeface="游ゴシック" pitchFamily="34" charset="-122"/>
-                <a:cs typeface="游ゴシック" pitchFamily="34" charset="-120"/>
-              </a:rPr>
-              <a:t>売上だけでなく、車両費・人件費の引き当ても毎回必ず行ってください。正確な原価把握につながります。</a:t>
-            </a:r>
-            <a:endParaRPr lang="en-US" sz="1300" dirty="0"/>
-          </a:p>
-        </p:txBody>
-      </p:sp>
-    </p:spTree>
-  </p:cSld>
-  <p:clrMapOvr>
-    <a:masterClrMapping/>
-  </p:clrMapOvr>
-</p:sld>
-</file>
-
 <file path=ppt/theme/theme1.xml><?xml version="1.0" encoding="utf-8"?>
 <a:theme xmlns:a="http://schemas.openxmlformats.org/drawingml/2006/main" name="Office Theme">
   <a:themeElements>
